--- a/docs/Quest_Avatar_Placement_Algorithm_NaReT_Updated.pptx
+++ b/docs/Quest_Avatar_Placement_Algorithm_NaReT_Updated.pptx
@@ -17,10 +17,8 @@
     <p:sldId id="266" r:id="rId11"/>
     <p:sldId id="267" r:id="rId12"/>
     <p:sldId id="268" r:id="rId13"/>
-    <p:sldId id="269" r:id="rId14"/>
+    <p:sldId id="274" r:id="rId14"/>
     <p:sldId id="270" r:id="rId15"/>
-    <p:sldId id="271" r:id="rId16"/>
-    <p:sldId id="272" r:id="rId17"/>
   </p:sldIdLst>
   <p:sldSz cx="12192000" cy="6858000"/>
   <p:notesSz cx="6858000" cy="9144000"/>
@@ -7251,14 +7249,6 @@
 <file path=ppt/slides/slide13.xml><?xml version="1.0" encoding="utf-8"?>
 <p:sld xmlns:a="http://schemas.openxmlformats.org/drawingml/2006/main" xmlns:r="http://schemas.openxmlformats.org/officeDocument/2006/relationships" xmlns:p="http://schemas.openxmlformats.org/presentationml/2006/main">
   <p:cSld>
-    <p:bg>
-      <p:bgPr>
-        <a:solidFill>
-          <a:srgbClr val="F5F8FC"/>
-        </a:solidFill>
-        <a:effectLst/>
-      </p:bgPr>
-    </p:bg>
     <p:spTree>
       <p:nvGrpSpPr>
         <p:cNvPr id="1" name=""/>
@@ -7278,7 +7268,7 @@
           <p:cNvPr id="2" name="TextBox 1">
             <a:extLst>
               <a:ext uri="{FF2B5EF4-FFF2-40B4-BE49-F238E27FC236}">
-                <a16:creationId xmlns:a16="http://schemas.microsoft.com/office/drawing/2014/main" id="{EB9F5EBC-9111-976F-7D04-35ED5FFB0395}"/>
+                <a16:creationId xmlns:a16="http://schemas.microsoft.com/office/drawing/2014/main" id="{7EFB96AF-FCF0-A9C5-4236-18DD5B453D88}"/>
               </a:ext>
             </a:extLst>
           </p:cNvPr>
@@ -7287,8 +7277,8 @@
         </p:nvSpPr>
         <p:spPr>
           <a:xfrm>
-            <a:off x="533400" y="279400"/>
-            <a:ext cx="7620000" cy="153888"/>
+            <a:off x="675060" y="447995"/>
+            <a:ext cx="10027716" cy="923330"/>
           </a:xfrm>
           <a:prstGeom prst="rect">
             <a:avLst/>
@@ -7296,910 +7286,31 @@
           <a:noFill/>
         </p:spPr>
         <p:txBody>
-          <a:bodyPr vert="horz" lIns="0" tIns="0" rIns="0" bIns="0" rtlCol="0" anchor="t">
+          <a:bodyPr wrap="square" rtlCol="0">
             <a:spAutoFit/>
           </a:bodyPr>
           <a:lstStyle/>
           <a:p>
             <a:r>
-              <a:rPr lang="en-GB" sz="1000" b="1">
-                <a:solidFill>
-                  <a:srgbClr val="1976D2"/>
-                </a:solidFill>
-                <a:latin typeface="Aptos" panose="020B0004020202020204" pitchFamily="34" charset="0"/>
-              </a:rPr>
-              <a:t>CURRENT QUEST RUNTIME</a:t>
-            </a:r>
-          </a:p>
-        </p:txBody>
-      </p:sp>
-      <p:sp>
-        <p:nvSpPr>
-          <p:cNvPr id="3" name="TextBox 2">
-            <a:extLst>
-              <a:ext uri="{FF2B5EF4-FFF2-40B4-BE49-F238E27FC236}">
-                <a16:creationId xmlns:a16="http://schemas.microsoft.com/office/drawing/2014/main" id="{08864902-746C-4BF7-8D5D-080BCD1BEB5A}"/>
-              </a:ext>
-            </a:extLst>
-          </p:cNvPr>
-          <p:cNvSpPr txBox="1"/>
-          <p:nvPr/>
-        </p:nvSpPr>
-        <p:spPr>
-          <a:xfrm>
-            <a:off x="533400" y="609600"/>
-            <a:ext cx="10985500" cy="430887"/>
-          </a:xfrm>
-          <a:prstGeom prst="rect">
-            <a:avLst/>
-          </a:prstGeom>
-          <a:noFill/>
-        </p:spPr>
-        <p:txBody>
-          <a:bodyPr vert="horz" lIns="0" tIns="0" rIns="0" bIns="0" rtlCol="0" anchor="t">
-            <a:spAutoFit/>
-          </a:bodyPr>
-          <a:lstStyle/>
-          <a:p>
-            <a:r>
-              <a:rPr lang="en-GB" sz="2800" b="1">
-                <a:solidFill>
-                  <a:srgbClr val="102A43"/>
-                </a:solidFill>
-                <a:latin typeface="Aptos" panose="020B0004020202020204" pitchFamily="34" charset="0"/>
-              </a:rPr>
-              <a:t>What to do next — in the correct order</a:t>
-            </a:r>
-          </a:p>
-        </p:txBody>
-      </p:sp>
-      <p:sp>
-        <p:nvSpPr>
-          <p:cNvPr id="4" name="Rectangle 3">
-            <a:extLst>
-              <a:ext uri="{FF2B5EF4-FFF2-40B4-BE49-F238E27FC236}">
-                <a16:creationId xmlns:a16="http://schemas.microsoft.com/office/drawing/2014/main" id="{BF650C60-CB38-B1DD-DB77-DE01421009B7}"/>
-              </a:ext>
-            </a:extLst>
-          </p:cNvPr>
-          <p:cNvSpPr/>
-          <p:nvPr/>
-        </p:nvSpPr>
-        <p:spPr>
-          <a:xfrm>
-            <a:off x="533400" y="1282700"/>
-            <a:ext cx="11125200" cy="38100"/>
-          </a:xfrm>
-          <a:prstGeom prst="rect">
-            <a:avLst/>
-          </a:prstGeom>
-          <a:solidFill>
-            <a:srgbClr val="2CB1BC"/>
-          </a:solidFill>
-          <a:ln w="19050" cap="flat" cmpd="sng" algn="ctr">
-            <a:noFill/>
-            <a:prstDash val="solid"/>
-            <a:miter lim="800000"/>
-          </a:ln>
-          <a:effectLst/>
-          <a:extLst>
-            <a:ext uri="{91240B29-F687-4F45-9708-019B960494DF}">
-              <a14:hiddenLine xmlns:a14="http://schemas.microsoft.com/office/drawing/2010/main" w="19050" cap="flat" cmpd="sng" algn="ctr">
-                <a:solidFill>
-                  <a:schemeClr val="accent1">
-                    <a:shade val="15000"/>
-                  </a:schemeClr>
-                </a:solidFill>
-                <a:prstDash val="solid"/>
-                <a:miter lim="800000"/>
-              </a14:hiddenLine>
-            </a:ext>
-          </a:extLst>
-        </p:spPr>
-        <p:style>
-          <a:lnRef idx="2">
-            <a:schemeClr val="accent1">
-              <a:shade val="15000"/>
-            </a:schemeClr>
-          </a:lnRef>
-          <a:fillRef idx="1">
-            <a:schemeClr val="accent1"/>
-          </a:fillRef>
-          <a:effectRef idx="0">
-            <a:schemeClr val="accent1"/>
-          </a:effectRef>
-          <a:fontRef idx="minor">
-            <a:schemeClr val="lt1"/>
-          </a:fontRef>
-        </p:style>
-        <p:txBody>
-          <a:bodyPr rtlCol="0" anchor="ctr"/>
-          <a:lstStyle/>
-          <a:p>
-            <a:pPr algn="ctr"/>
+              <a:rPr lang="en-GB" dirty="0"/>
+              <a:t>Calibration</a:t>
+            </a:r>
+          </a:p>
+          <a:p>
+            <a:r>
+              <a:rPr lang="en-GB"/>
+              <a:t>POSITION OF MARKERS</a:t>
+            </a:r>
+          </a:p>
+          <a:p>
             <a:endParaRPr lang="en-GB"/>
-          </a:p>
-        </p:txBody>
-      </p:sp>
-      <p:sp>
-        <p:nvSpPr>
-          <p:cNvPr id="5" name="Oval 4">
-            <a:extLst>
-              <a:ext uri="{FF2B5EF4-FFF2-40B4-BE49-F238E27FC236}">
-                <a16:creationId xmlns:a16="http://schemas.microsoft.com/office/drawing/2014/main" id="{EB8DFB1A-DA11-09ED-0956-D94283764C09}"/>
-              </a:ext>
-            </a:extLst>
-          </p:cNvPr>
-          <p:cNvSpPr/>
-          <p:nvPr/>
-        </p:nvSpPr>
-        <p:spPr>
-          <a:xfrm>
-            <a:off x="838200" y="1790700"/>
-            <a:ext cx="660400" cy="660400"/>
-          </a:xfrm>
-          <a:prstGeom prst="ellipse">
-            <a:avLst/>
-          </a:prstGeom>
-          <a:solidFill>
-            <a:srgbClr val="102A43"/>
-          </a:solidFill>
-          <a:ln>
-            <a:solidFill>
-              <a:srgbClr val="102A43"/>
-            </a:solidFill>
-          </a:ln>
-        </p:spPr>
-        <p:style>
-          <a:lnRef idx="2">
-            <a:schemeClr val="accent1">
-              <a:shade val="15000"/>
-            </a:schemeClr>
-          </a:lnRef>
-          <a:fillRef idx="1">
-            <a:schemeClr val="accent1"/>
-          </a:fillRef>
-          <a:effectRef idx="0">
-            <a:schemeClr val="accent1"/>
-          </a:effectRef>
-          <a:fontRef idx="minor">
-            <a:schemeClr val="lt1"/>
-          </a:fontRef>
-        </p:style>
-        <p:txBody>
-          <a:bodyPr rtlCol="0" anchor="ctr"/>
-          <a:lstStyle/>
-          <a:p>
-            <a:pPr algn="ctr"/>
-            <a:r>
-              <a:rPr lang="en-GB" b="1">
-                <a:solidFill>
-                  <a:srgbClr val="FFFFFF"/>
-                </a:solidFill>
-                <a:latin typeface="Aptos" panose="020B0004020202020204" pitchFamily="34" charset="0"/>
-              </a:rPr>
-              <a:t>1</a:t>
-            </a:r>
-          </a:p>
-        </p:txBody>
-      </p:sp>
-      <p:sp>
-        <p:nvSpPr>
-          <p:cNvPr id="6" name="TextBox 5">
-            <a:extLst>
-              <a:ext uri="{FF2B5EF4-FFF2-40B4-BE49-F238E27FC236}">
-                <a16:creationId xmlns:a16="http://schemas.microsoft.com/office/drawing/2014/main" id="{8C177336-6E5E-9A6C-22B4-72C05E24CD4B}"/>
-              </a:ext>
-            </a:extLst>
-          </p:cNvPr>
-          <p:cNvSpPr txBox="1"/>
-          <p:nvPr/>
-        </p:nvSpPr>
-        <p:spPr>
-          <a:xfrm>
-            <a:off x="1727200" y="1701800"/>
-            <a:ext cx="2857500" cy="246221"/>
-          </a:xfrm>
-          <a:prstGeom prst="rect">
-            <a:avLst/>
-          </a:prstGeom>
-          <a:noFill/>
-        </p:spPr>
-        <p:txBody>
-          <a:bodyPr vert="horz" lIns="0" tIns="0" rIns="0" bIns="0" rtlCol="0" anchor="t">
-            <a:spAutoFit/>
-          </a:bodyPr>
-          <a:lstStyle/>
-          <a:p>
-            <a:r>
-              <a:rPr lang="en-GB" sz="1600" b="1">
-                <a:solidFill>
-                  <a:srgbClr val="102A43"/>
-                </a:solidFill>
-                <a:latin typeface="Aptos" panose="020B0004020202020204" pitchFamily="34" charset="0"/>
-              </a:rPr>
-              <a:t>SAVE BASELINE</a:t>
-            </a:r>
-          </a:p>
-        </p:txBody>
-      </p:sp>
-      <p:sp>
-        <p:nvSpPr>
-          <p:cNvPr id="7" name="TextBox 6">
-            <a:extLst>
-              <a:ext uri="{FF2B5EF4-FFF2-40B4-BE49-F238E27FC236}">
-                <a16:creationId xmlns:a16="http://schemas.microsoft.com/office/drawing/2014/main" id="{7B340707-F94E-0569-B554-AC75E2793050}"/>
-              </a:ext>
-            </a:extLst>
-          </p:cNvPr>
-          <p:cNvSpPr txBox="1"/>
-          <p:nvPr/>
-        </p:nvSpPr>
-        <p:spPr>
-          <a:xfrm>
-            <a:off x="4635500" y="1701800"/>
-            <a:ext cx="6604000" cy="230832"/>
-          </a:xfrm>
-          <a:prstGeom prst="rect">
-            <a:avLst/>
-          </a:prstGeom>
-          <a:noFill/>
-        </p:spPr>
-        <p:txBody>
-          <a:bodyPr vert="horz" lIns="0" tIns="0" rIns="0" bIns="0" rtlCol="0" anchor="t">
-            <a:spAutoFit/>
-          </a:bodyPr>
-          <a:lstStyle/>
-          <a:p>
-            <a:r>
-              <a:rPr lang="en-GB" sz="1500">
-                <a:solidFill>
-                  <a:srgbClr val="16324F"/>
-                </a:solidFill>
-                <a:latin typeface="Aptos" panose="020B0004020202020204" pitchFamily="34" charset="0"/>
-              </a:rPr>
-              <a:t>Clean the working tree; commit and push the current 10 cm working version.</a:t>
-            </a:r>
-          </a:p>
-        </p:txBody>
-      </p:sp>
-      <p:cxnSp>
-        <p:nvCxnSpPr>
-          <p:cNvPr id="8" name="Straight Arrow Connector 7">
-            <a:extLst>
-              <a:ext uri="{FF2B5EF4-FFF2-40B4-BE49-F238E27FC236}">
-                <a16:creationId xmlns:a16="http://schemas.microsoft.com/office/drawing/2014/main" id="{F36F5E6B-36F7-836E-ECB6-21F93180F13F}"/>
-              </a:ext>
-            </a:extLst>
-          </p:cNvPr>
-          <p:cNvCxnSpPr/>
-          <p:nvPr/>
-        </p:nvCxnSpPr>
-        <p:spPr>
-          <a:xfrm>
-            <a:off x="1168400" y="2451100"/>
-            <a:ext cx="0" cy="279400"/>
-          </a:xfrm>
-          <a:prstGeom prst="straightConnector1">
-            <a:avLst/>
-          </a:prstGeom>
-          <a:ln w="25400">
-            <a:solidFill>
-              <a:srgbClr val="5C7084"/>
-            </a:solidFill>
-            <a:tailEnd type="arrow"/>
-          </a:ln>
-        </p:spPr>
-        <p:style>
-          <a:lnRef idx="2">
-            <a:schemeClr val="accent1"/>
-          </a:lnRef>
-          <a:fillRef idx="0">
-            <a:schemeClr val="accent1"/>
-          </a:fillRef>
-          <a:effectRef idx="1">
-            <a:schemeClr val="accent1"/>
-          </a:effectRef>
-          <a:fontRef idx="minor">
-            <a:schemeClr val="tx1"/>
-          </a:fontRef>
-        </p:style>
-      </p:cxnSp>
-      <p:sp>
-        <p:nvSpPr>
-          <p:cNvPr id="9" name="Oval 8">
-            <a:extLst>
-              <a:ext uri="{FF2B5EF4-FFF2-40B4-BE49-F238E27FC236}">
-                <a16:creationId xmlns:a16="http://schemas.microsoft.com/office/drawing/2014/main" id="{114F36A5-82CF-F1FB-5525-0E018C0B177B}"/>
-              </a:ext>
-            </a:extLst>
-          </p:cNvPr>
-          <p:cNvSpPr/>
-          <p:nvPr/>
-        </p:nvSpPr>
-        <p:spPr>
-          <a:xfrm>
-            <a:off x="838200" y="2908300"/>
-            <a:ext cx="660400" cy="660400"/>
-          </a:xfrm>
-          <a:prstGeom prst="ellipse">
-            <a:avLst/>
-          </a:prstGeom>
-          <a:solidFill>
-            <a:srgbClr val="1976D2"/>
-          </a:solidFill>
-          <a:ln>
-            <a:solidFill>
-              <a:srgbClr val="1976D2"/>
-            </a:solidFill>
-          </a:ln>
-        </p:spPr>
-        <p:style>
-          <a:lnRef idx="2">
-            <a:schemeClr val="accent1">
-              <a:shade val="15000"/>
-            </a:schemeClr>
-          </a:lnRef>
-          <a:fillRef idx="1">
-            <a:schemeClr val="accent1"/>
-          </a:fillRef>
-          <a:effectRef idx="0">
-            <a:schemeClr val="accent1"/>
-          </a:effectRef>
-          <a:fontRef idx="minor">
-            <a:schemeClr val="lt1"/>
-          </a:fontRef>
-        </p:style>
-        <p:txBody>
-          <a:bodyPr rtlCol="0" anchor="ctr"/>
-          <a:lstStyle/>
-          <a:p>
-            <a:pPr algn="ctr"/>
-            <a:r>
-              <a:rPr lang="en-GB" b="1">
-                <a:solidFill>
-                  <a:srgbClr val="FFFFFF"/>
-                </a:solidFill>
-                <a:latin typeface="Aptos" panose="020B0004020202020204" pitchFamily="34" charset="0"/>
-              </a:rPr>
-              <a:t>2</a:t>
-            </a:r>
-          </a:p>
-        </p:txBody>
-      </p:sp>
-      <p:sp>
-        <p:nvSpPr>
-          <p:cNvPr id="10" name="TextBox 9">
-            <a:extLst>
-              <a:ext uri="{FF2B5EF4-FFF2-40B4-BE49-F238E27FC236}">
-                <a16:creationId xmlns:a16="http://schemas.microsoft.com/office/drawing/2014/main" id="{A726B066-2340-4B83-1371-BA89B530F539}"/>
-              </a:ext>
-            </a:extLst>
-          </p:cNvPr>
-          <p:cNvSpPr txBox="1"/>
-          <p:nvPr/>
-        </p:nvSpPr>
-        <p:spPr>
-          <a:xfrm>
-            <a:off x="1727200" y="2819400"/>
-            <a:ext cx="2857500" cy="246221"/>
-          </a:xfrm>
-          <a:prstGeom prst="rect">
-            <a:avLst/>
-          </a:prstGeom>
-          <a:noFill/>
-        </p:spPr>
-        <p:txBody>
-          <a:bodyPr vert="horz" lIns="0" tIns="0" rIns="0" bIns="0" rtlCol="0" anchor="t">
-            <a:spAutoFit/>
-          </a:bodyPr>
-          <a:lstStyle/>
-          <a:p>
-            <a:r>
-              <a:rPr lang="en-GB" sz="1600" b="1">
-                <a:solidFill>
-                  <a:srgbClr val="1976D2"/>
-                </a:solidFill>
-                <a:latin typeface="Aptos" panose="020B0004020202020204" pitchFamily="34" charset="0"/>
-              </a:rPr>
-              <a:t>TEST SMALL MARKERS</a:t>
-            </a:r>
-          </a:p>
-        </p:txBody>
-      </p:sp>
-      <p:sp>
-        <p:nvSpPr>
-          <p:cNvPr id="11" name="TextBox 10">
-            <a:extLst>
-              <a:ext uri="{FF2B5EF4-FFF2-40B4-BE49-F238E27FC236}">
-                <a16:creationId xmlns:a16="http://schemas.microsoft.com/office/drawing/2014/main" id="{248353BA-34D4-7D39-5A66-917788684F43}"/>
-              </a:ext>
-            </a:extLst>
-          </p:cNvPr>
-          <p:cNvSpPr txBox="1"/>
-          <p:nvPr/>
-        </p:nvSpPr>
-        <p:spPr>
-          <a:xfrm>
-            <a:off x="4635500" y="2819400"/>
-            <a:ext cx="6604000" cy="230832"/>
-          </a:xfrm>
-          <a:prstGeom prst="rect">
-            <a:avLst/>
-          </a:prstGeom>
-          <a:noFill/>
-        </p:spPr>
-        <p:txBody>
-          <a:bodyPr vert="horz" lIns="0" tIns="0" rIns="0" bIns="0" rtlCol="0" anchor="t">
-            <a:spAutoFit/>
-          </a:bodyPr>
-          <a:lstStyle/>
-          <a:p>
-            <a:r>
-              <a:rPr lang="en-GB" sz="1500">
-                <a:solidFill>
-                  <a:srgbClr val="16324F"/>
-                </a:solidFill>
-                <a:latin typeface="Aptos" panose="020B0004020202020204" pitchFamily="34" charset="0"/>
-              </a:rPr>
-              <a:t>Keep IDs 0/1/2 and DICT_4X4_50; compare 10, 7.5 and 5 cm.</a:t>
-            </a:r>
-          </a:p>
-        </p:txBody>
-      </p:sp>
-      <p:cxnSp>
-        <p:nvCxnSpPr>
-          <p:cNvPr id="12" name="Straight Arrow Connector 11">
-            <a:extLst>
-              <a:ext uri="{FF2B5EF4-FFF2-40B4-BE49-F238E27FC236}">
-                <a16:creationId xmlns:a16="http://schemas.microsoft.com/office/drawing/2014/main" id="{91911C4C-DBEC-8D2B-7E02-07E9060E2432}"/>
-              </a:ext>
-            </a:extLst>
-          </p:cNvPr>
-          <p:cNvCxnSpPr/>
-          <p:nvPr/>
-        </p:nvCxnSpPr>
-        <p:spPr>
-          <a:xfrm>
-            <a:off x="1168400" y="3568700"/>
-            <a:ext cx="0" cy="279400"/>
-          </a:xfrm>
-          <a:prstGeom prst="straightConnector1">
-            <a:avLst/>
-          </a:prstGeom>
-          <a:ln w="25400">
-            <a:solidFill>
-              <a:srgbClr val="5C7084"/>
-            </a:solidFill>
-            <a:tailEnd type="arrow"/>
-          </a:ln>
-        </p:spPr>
-        <p:style>
-          <a:lnRef idx="2">
-            <a:schemeClr val="accent1"/>
-          </a:lnRef>
-          <a:fillRef idx="0">
-            <a:schemeClr val="accent1"/>
-          </a:fillRef>
-          <a:effectRef idx="1">
-            <a:schemeClr val="accent1"/>
-          </a:effectRef>
-          <a:fontRef idx="minor">
-            <a:schemeClr val="tx1"/>
-          </a:fontRef>
-        </p:style>
-      </p:cxnSp>
-      <p:sp>
-        <p:nvSpPr>
-          <p:cNvPr id="13" name="Oval 12">
-            <a:extLst>
-              <a:ext uri="{FF2B5EF4-FFF2-40B4-BE49-F238E27FC236}">
-                <a16:creationId xmlns:a16="http://schemas.microsoft.com/office/drawing/2014/main" id="{05E300A9-93AC-4697-8358-C925E7786337}"/>
-              </a:ext>
-            </a:extLst>
-          </p:cNvPr>
-          <p:cNvSpPr/>
-          <p:nvPr/>
-        </p:nvSpPr>
-        <p:spPr>
-          <a:xfrm>
-            <a:off x="838200" y="4025900"/>
-            <a:ext cx="660400" cy="660400"/>
-          </a:xfrm>
-          <a:prstGeom prst="ellipse">
-            <a:avLst/>
-          </a:prstGeom>
-          <a:solidFill>
-            <a:srgbClr val="7152AD"/>
-          </a:solidFill>
-          <a:ln>
-            <a:solidFill>
-              <a:srgbClr val="7152AD"/>
-            </a:solidFill>
-          </a:ln>
-        </p:spPr>
-        <p:style>
-          <a:lnRef idx="2">
-            <a:schemeClr val="accent1">
-              <a:shade val="15000"/>
-            </a:schemeClr>
-          </a:lnRef>
-          <a:fillRef idx="1">
-            <a:schemeClr val="accent1"/>
-          </a:fillRef>
-          <a:effectRef idx="0">
-            <a:schemeClr val="accent1"/>
-          </a:effectRef>
-          <a:fontRef idx="minor">
-            <a:schemeClr val="lt1"/>
-          </a:fontRef>
-        </p:style>
-        <p:txBody>
-          <a:bodyPr rtlCol="0" anchor="ctr"/>
-          <a:lstStyle/>
-          <a:p>
-            <a:pPr algn="ctr"/>
-            <a:r>
-              <a:rPr lang="en-GB" b="1">
-                <a:solidFill>
-                  <a:srgbClr val="FFFFFF"/>
-                </a:solidFill>
-                <a:latin typeface="Aptos" panose="020B0004020202020204" pitchFamily="34" charset="0"/>
-              </a:rPr>
-              <a:t>3</a:t>
-            </a:r>
-          </a:p>
-        </p:txBody>
-      </p:sp>
-      <p:sp>
-        <p:nvSpPr>
-          <p:cNvPr id="14" name="TextBox 13">
-            <a:extLst>
-              <a:ext uri="{FF2B5EF4-FFF2-40B4-BE49-F238E27FC236}">
-                <a16:creationId xmlns:a16="http://schemas.microsoft.com/office/drawing/2014/main" id="{3783B6FA-FE9A-5647-2BA4-6DF9226559BC}"/>
-              </a:ext>
-            </a:extLst>
-          </p:cNvPr>
-          <p:cNvSpPr txBox="1"/>
-          <p:nvPr/>
-        </p:nvSpPr>
-        <p:spPr>
-          <a:xfrm>
-            <a:off x="1727200" y="3937000"/>
-            <a:ext cx="2857500" cy="246221"/>
-          </a:xfrm>
-          <a:prstGeom prst="rect">
-            <a:avLst/>
-          </a:prstGeom>
-          <a:noFill/>
-        </p:spPr>
-        <p:txBody>
-          <a:bodyPr vert="horz" lIns="0" tIns="0" rIns="0" bIns="0" rtlCol="0" anchor="t">
-            <a:spAutoFit/>
-          </a:bodyPr>
-          <a:lstStyle/>
-          <a:p>
-            <a:r>
-              <a:rPr lang="en-GB" sz="1600" b="1">
-                <a:solidFill>
-                  <a:srgbClr val="7152AD"/>
-                </a:solidFill>
-                <a:latin typeface="Aptos" panose="020B0004020202020204" pitchFamily="34" charset="0"/>
-              </a:rPr>
-              <a:t>FINALIZE TRACKING</a:t>
-            </a:r>
-          </a:p>
-        </p:txBody>
-      </p:sp>
-      <p:sp>
-        <p:nvSpPr>
-          <p:cNvPr id="15" name="TextBox 14">
-            <a:extLst>
-              <a:ext uri="{FF2B5EF4-FFF2-40B4-BE49-F238E27FC236}">
-                <a16:creationId xmlns:a16="http://schemas.microsoft.com/office/drawing/2014/main" id="{446B34C0-C876-E7D7-7937-F073E486BABA}"/>
-              </a:ext>
-            </a:extLst>
-          </p:cNvPr>
-          <p:cNvSpPr txBox="1"/>
-          <p:nvPr/>
-        </p:nvSpPr>
-        <p:spPr>
-          <a:xfrm>
-            <a:off x="4635500" y="3937000"/>
-            <a:ext cx="6604000" cy="230832"/>
-          </a:xfrm>
-          <a:prstGeom prst="rect">
-            <a:avLst/>
-          </a:prstGeom>
-          <a:noFill/>
-        </p:spPr>
-        <p:txBody>
-          <a:bodyPr vert="horz" lIns="0" tIns="0" rIns="0" bIns="0" rtlCol="0" anchor="t">
-            <a:spAutoFit/>
-          </a:bodyPr>
-          <a:lstStyle/>
-          <a:p>
-            <a:r>
-              <a:rPr lang="en-GB" sz="1500">
-                <a:solidFill>
-                  <a:srgbClr val="16324F"/>
-                </a:solidFill>
-                <a:latin typeface="Aptos" panose="020B0004020202020204" pitchFamily="34" charset="0"/>
-              </a:rPr>
-              <a:t>Choose size, recalibrate, tune the filter and produce one clean APK.</a:t>
-            </a:r>
-          </a:p>
-        </p:txBody>
-      </p:sp>
-      <p:cxnSp>
-        <p:nvCxnSpPr>
-          <p:cNvPr id="16" name="Straight Arrow Connector 15">
-            <a:extLst>
-              <a:ext uri="{FF2B5EF4-FFF2-40B4-BE49-F238E27FC236}">
-                <a16:creationId xmlns:a16="http://schemas.microsoft.com/office/drawing/2014/main" id="{A3440C29-0555-47F7-B652-1334ECC0B9CF}"/>
-              </a:ext>
-            </a:extLst>
-          </p:cNvPr>
-          <p:cNvCxnSpPr/>
-          <p:nvPr/>
-        </p:nvCxnSpPr>
-        <p:spPr>
-          <a:xfrm>
-            <a:off x="1168400" y="4686300"/>
-            <a:ext cx="0" cy="279400"/>
-          </a:xfrm>
-          <a:prstGeom prst="straightConnector1">
-            <a:avLst/>
-          </a:prstGeom>
-          <a:ln w="25400">
-            <a:solidFill>
-              <a:srgbClr val="5C7084"/>
-            </a:solidFill>
-            <a:tailEnd type="arrow"/>
-          </a:ln>
-        </p:spPr>
-        <p:style>
-          <a:lnRef idx="2">
-            <a:schemeClr val="accent1"/>
-          </a:lnRef>
-          <a:fillRef idx="0">
-            <a:schemeClr val="accent1"/>
-          </a:fillRef>
-          <a:effectRef idx="1">
-            <a:schemeClr val="accent1"/>
-          </a:effectRef>
-          <a:fontRef idx="minor">
-            <a:schemeClr val="tx1"/>
-          </a:fontRef>
-        </p:style>
-      </p:cxnSp>
-      <p:sp>
-        <p:nvSpPr>
-          <p:cNvPr id="17" name="Oval 16">
-            <a:extLst>
-              <a:ext uri="{FF2B5EF4-FFF2-40B4-BE49-F238E27FC236}">
-                <a16:creationId xmlns:a16="http://schemas.microsoft.com/office/drawing/2014/main" id="{C6A7F07F-7064-A949-E7A0-4EEB34BEA962}"/>
-              </a:ext>
-            </a:extLst>
-          </p:cNvPr>
-          <p:cNvSpPr/>
-          <p:nvPr/>
-        </p:nvSpPr>
-        <p:spPr>
-          <a:xfrm>
-            <a:off x="838200" y="5143500"/>
-            <a:ext cx="660400" cy="660400"/>
-          </a:xfrm>
-          <a:prstGeom prst="ellipse">
-            <a:avLst/>
-          </a:prstGeom>
-          <a:solidFill>
-            <a:srgbClr val="27AE60"/>
-          </a:solidFill>
-          <a:ln>
-            <a:solidFill>
-              <a:srgbClr val="27AE60"/>
-            </a:solidFill>
-          </a:ln>
-        </p:spPr>
-        <p:style>
-          <a:lnRef idx="2">
-            <a:schemeClr val="accent1">
-              <a:shade val="15000"/>
-            </a:schemeClr>
-          </a:lnRef>
-          <a:fillRef idx="1">
-            <a:schemeClr val="accent1"/>
-          </a:fillRef>
-          <a:effectRef idx="0">
-            <a:schemeClr val="accent1"/>
-          </a:effectRef>
-          <a:fontRef idx="minor">
-            <a:schemeClr val="lt1"/>
-          </a:fontRef>
-        </p:style>
-        <p:txBody>
-          <a:bodyPr rtlCol="0" anchor="ctr"/>
-          <a:lstStyle/>
-          <a:p>
-            <a:pPr algn="ctr"/>
-            <a:r>
-              <a:rPr lang="en-GB" b="1">
-                <a:solidFill>
-                  <a:srgbClr val="FFFFFF"/>
-                </a:solidFill>
-                <a:latin typeface="Aptos" panose="020B0004020202020204" pitchFamily="34" charset="0"/>
-              </a:rPr>
-              <a:t>4</a:t>
-            </a:r>
-          </a:p>
-        </p:txBody>
-      </p:sp>
-      <p:sp>
-        <p:nvSpPr>
-          <p:cNvPr id="18" name="TextBox 17">
-            <a:extLst>
-              <a:ext uri="{FF2B5EF4-FFF2-40B4-BE49-F238E27FC236}">
-                <a16:creationId xmlns:a16="http://schemas.microsoft.com/office/drawing/2014/main" id="{A6E36D3F-0109-C493-1884-550EA11E4882}"/>
-              </a:ext>
-            </a:extLst>
-          </p:cNvPr>
-          <p:cNvSpPr txBox="1"/>
-          <p:nvPr/>
-        </p:nvSpPr>
-        <p:spPr>
-          <a:xfrm>
-            <a:off x="1727200" y="5054600"/>
-            <a:ext cx="2857500" cy="246221"/>
-          </a:xfrm>
-          <a:prstGeom prst="rect">
-            <a:avLst/>
-          </a:prstGeom>
-          <a:noFill/>
-        </p:spPr>
-        <p:txBody>
-          <a:bodyPr vert="horz" lIns="0" tIns="0" rIns="0" bIns="0" rtlCol="0" anchor="t">
-            <a:spAutoFit/>
-          </a:bodyPr>
-          <a:lstStyle/>
-          <a:p>
-            <a:r>
-              <a:rPr lang="en-GB" sz="1600" b="1">
-                <a:solidFill>
-                  <a:srgbClr val="27AE60"/>
-                </a:solidFill>
-                <a:latin typeface="Aptos" panose="020B0004020202020204" pitchFamily="34" charset="0"/>
-              </a:rPr>
-              <a:t>VALIDATE CPR</a:t>
-            </a:r>
-          </a:p>
-        </p:txBody>
-      </p:sp>
-      <p:sp>
-        <p:nvSpPr>
-          <p:cNvPr id="19" name="TextBox 18">
-            <a:extLst>
-              <a:ext uri="{FF2B5EF4-FFF2-40B4-BE49-F238E27FC236}">
-                <a16:creationId xmlns:a16="http://schemas.microsoft.com/office/drawing/2014/main" id="{1A0B2793-11F8-40D5-A8D3-297E7AE17874}"/>
-              </a:ext>
-            </a:extLst>
-          </p:cNvPr>
-          <p:cNvSpPr txBox="1"/>
-          <p:nvPr/>
-        </p:nvSpPr>
-        <p:spPr>
-          <a:xfrm>
-            <a:off x="4635500" y="5054600"/>
-            <a:ext cx="6604000" cy="230832"/>
-          </a:xfrm>
-          <a:prstGeom prst="rect">
-            <a:avLst/>
-          </a:prstGeom>
-          <a:noFill/>
-        </p:spPr>
-        <p:txBody>
-          <a:bodyPr vert="horz" lIns="0" tIns="0" rIns="0" bIns="0" rtlCol="0" anchor="t">
-            <a:spAutoFit/>
-          </a:bodyPr>
-          <a:lstStyle/>
-          <a:p>
-            <a:r>
-              <a:rPr lang="en-GB" sz="1500">
-                <a:solidFill>
-                  <a:srgbClr val="16324F"/>
-                </a:solidFill>
-                <a:latin typeface="Aptos" panose="020B0004020202020204" pitchFamily="34" charset="0"/>
-              </a:rPr>
-              <a:t>Run the complete BLS scenario, not only an avatar-visibility test.</a:t>
-            </a:r>
-          </a:p>
-        </p:txBody>
-      </p:sp>
-      <p:sp>
-        <p:nvSpPr>
-          <p:cNvPr id="20" name="TextBox 19">
-            <a:extLst>
-              <a:ext uri="{FF2B5EF4-FFF2-40B4-BE49-F238E27FC236}">
-                <a16:creationId xmlns:a16="http://schemas.microsoft.com/office/drawing/2014/main" id="{64FB9424-302E-8643-2992-144EB9452248}"/>
-              </a:ext>
-            </a:extLst>
-          </p:cNvPr>
-          <p:cNvSpPr txBox="1"/>
-          <p:nvPr/>
-        </p:nvSpPr>
-        <p:spPr>
-          <a:xfrm>
-            <a:off x="533400" y="6489700"/>
-            <a:ext cx="9779000" cy="123111"/>
-          </a:xfrm>
-          <a:prstGeom prst="rect">
-            <a:avLst/>
-          </a:prstGeom>
-          <a:noFill/>
-        </p:spPr>
-        <p:txBody>
-          <a:bodyPr vert="horz" lIns="0" tIns="0" rIns="0" bIns="0" rtlCol="0" anchor="t">
-            <a:spAutoFit/>
-          </a:bodyPr>
-          <a:lstStyle/>
-          <a:p>
-            <a:r>
-              <a:rPr lang="en-GB" sz="800">
-                <a:solidFill>
-                  <a:srgbClr val="5C7084"/>
-                </a:solidFill>
-                <a:latin typeface="Aptos" panose="020B0004020202020204" pitchFamily="34" charset="0"/>
-              </a:rPr>
-              <a:t>The barcode experiment begins only after the current working version is recoverable from GitHub</a:t>
-            </a:r>
-          </a:p>
-        </p:txBody>
-      </p:sp>
-      <p:sp>
-        <p:nvSpPr>
-          <p:cNvPr id="21" name="TextBox 20">
-            <a:extLst>
-              <a:ext uri="{FF2B5EF4-FFF2-40B4-BE49-F238E27FC236}">
-                <a16:creationId xmlns:a16="http://schemas.microsoft.com/office/drawing/2014/main" id="{9A612DE9-1405-5EB0-053E-3A416B45486F}"/>
-              </a:ext>
-            </a:extLst>
-          </p:cNvPr>
-          <p:cNvSpPr txBox="1"/>
-          <p:nvPr/>
-        </p:nvSpPr>
-        <p:spPr>
-          <a:xfrm>
-            <a:off x="11074400" y="6438900"/>
-            <a:ext cx="584200" cy="138499"/>
-          </a:xfrm>
-          <a:prstGeom prst="rect">
-            <a:avLst/>
-          </a:prstGeom>
-          <a:noFill/>
-        </p:spPr>
-        <p:txBody>
-          <a:bodyPr vert="horz" lIns="0" tIns="0" rIns="0" bIns="0" rtlCol="0" anchor="t">
-            <a:spAutoFit/>
-          </a:bodyPr>
-          <a:lstStyle/>
-          <a:p>
-            <a:pPr algn="r"/>
-            <a:r>
-              <a:rPr lang="en-GB" sz="900" b="1">
-                <a:solidFill>
-                  <a:srgbClr val="5C7084"/>
-                </a:solidFill>
-                <a:latin typeface="Aptos" panose="020B0004020202020204" pitchFamily="34" charset="0"/>
-              </a:rPr>
-              <a:t>14</a:t>
-            </a:r>
           </a:p>
         </p:txBody>
       </p:sp>
     </p:spTree>
     <p:extLst>
       <p:ext uri="{BB962C8B-B14F-4D97-AF65-F5344CB8AC3E}">
-        <p14:creationId xmlns:p14="http://schemas.microsoft.com/office/powerpoint/2010/main" val="2154767361"/>
+        <p14:creationId xmlns:p14="http://schemas.microsoft.com/office/powerpoint/2010/main" val="4215649581"/>
       </p:ext>
     </p:extLst>
   </p:cSld>
@@ -9299,2480 +8410,6 @@
     <p:extLst>
       <p:ext uri="{BB962C8B-B14F-4D97-AF65-F5344CB8AC3E}">
         <p14:creationId xmlns:p14="http://schemas.microsoft.com/office/powerpoint/2010/main" val="3864718002"/>
-      </p:ext>
-    </p:extLst>
-  </p:cSld>
-  <p:clrMapOvr>
-    <a:masterClrMapping/>
-  </p:clrMapOvr>
-</p:sld>
-</file>
-
-<file path=ppt/slides/slide15.xml><?xml version="1.0" encoding="utf-8"?>
-<p:sld xmlns:a="http://schemas.openxmlformats.org/drawingml/2006/main" xmlns:r="http://schemas.openxmlformats.org/officeDocument/2006/relationships" xmlns:p="http://schemas.openxmlformats.org/presentationml/2006/main">
-  <p:cSld>
-    <p:bg>
-      <p:bgPr>
-        <a:solidFill>
-          <a:srgbClr val="F5F8FC"/>
-        </a:solidFill>
-        <a:effectLst/>
-      </p:bgPr>
-    </p:bg>
-    <p:spTree>
-      <p:nvGrpSpPr>
-        <p:cNvPr id="1" name=""/>
-        <p:cNvGrpSpPr/>
-        <p:nvPr/>
-      </p:nvGrpSpPr>
-      <p:grpSpPr>
-        <a:xfrm>
-          <a:off x="0" y="0"/>
-          <a:ext cx="0" cy="0"/>
-          <a:chOff x="0" y="0"/>
-          <a:chExt cx="0" cy="0"/>
-        </a:xfrm>
-      </p:grpSpPr>
-      <p:sp>
-        <p:nvSpPr>
-          <p:cNvPr id="2" name="TextBox 1">
-            <a:extLst>
-              <a:ext uri="{FF2B5EF4-FFF2-40B4-BE49-F238E27FC236}">
-                <a16:creationId xmlns:a16="http://schemas.microsoft.com/office/drawing/2014/main" id="{E0C535F7-9C62-0FD0-808A-651556372E21}"/>
-              </a:ext>
-            </a:extLst>
-          </p:cNvPr>
-          <p:cNvSpPr txBox="1"/>
-          <p:nvPr/>
-        </p:nvSpPr>
-        <p:spPr>
-          <a:xfrm>
-            <a:off x="533400" y="279400"/>
-            <a:ext cx="7620000" cy="153888"/>
-          </a:xfrm>
-          <a:prstGeom prst="rect">
-            <a:avLst/>
-          </a:prstGeom>
-          <a:noFill/>
-        </p:spPr>
-        <p:txBody>
-          <a:bodyPr vert="horz" lIns="0" tIns="0" rIns="0" bIns="0" rtlCol="0" anchor="t">
-            <a:spAutoFit/>
-          </a:bodyPr>
-          <a:lstStyle/>
-          <a:p>
-            <a:r>
-              <a:rPr lang="en-GB" sz="1000" b="1">
-                <a:solidFill>
-                  <a:srgbClr val="1976D2"/>
-                </a:solidFill>
-                <a:latin typeface="Aptos" panose="020B0004020202020204" pitchFamily="34" charset="0"/>
-              </a:rPr>
-              <a:t>CURRENT QUEST RUNTIME</a:t>
-            </a:r>
-          </a:p>
-        </p:txBody>
-      </p:sp>
-      <p:sp>
-        <p:nvSpPr>
-          <p:cNvPr id="3" name="TextBox 2">
-            <a:extLst>
-              <a:ext uri="{FF2B5EF4-FFF2-40B4-BE49-F238E27FC236}">
-                <a16:creationId xmlns:a16="http://schemas.microsoft.com/office/drawing/2014/main" id="{4DEE2579-63D5-FF5F-0CEB-ED575C1FB3E2}"/>
-              </a:ext>
-            </a:extLst>
-          </p:cNvPr>
-          <p:cNvSpPr txBox="1"/>
-          <p:nvPr/>
-        </p:nvSpPr>
-        <p:spPr>
-          <a:xfrm>
-            <a:off x="533400" y="609600"/>
-            <a:ext cx="10985500" cy="430887"/>
-          </a:xfrm>
-          <a:prstGeom prst="rect">
-            <a:avLst/>
-          </a:prstGeom>
-          <a:noFill/>
-        </p:spPr>
-        <p:txBody>
-          <a:bodyPr vert="horz" lIns="0" tIns="0" rIns="0" bIns="0" rtlCol="0" anchor="t">
-            <a:spAutoFit/>
-          </a:bodyPr>
-          <a:lstStyle/>
-          <a:p>
-            <a:r>
-              <a:rPr lang="en-GB" sz="2800" b="1">
-                <a:solidFill>
-                  <a:srgbClr val="102A43"/>
-                </a:solidFill>
-                <a:latin typeface="Aptos" panose="020B0004020202020204" pitchFamily="34" charset="0"/>
-              </a:rPr>
-              <a:t>The complete CPR acceptance test</a:t>
-            </a:r>
-          </a:p>
-        </p:txBody>
-      </p:sp>
-      <p:sp>
-        <p:nvSpPr>
-          <p:cNvPr id="4" name="Rectangle 3">
-            <a:extLst>
-              <a:ext uri="{FF2B5EF4-FFF2-40B4-BE49-F238E27FC236}">
-                <a16:creationId xmlns:a16="http://schemas.microsoft.com/office/drawing/2014/main" id="{F624874E-E67E-8C1A-F5D3-D2694E559A7F}"/>
-              </a:ext>
-            </a:extLst>
-          </p:cNvPr>
-          <p:cNvSpPr/>
-          <p:nvPr/>
-        </p:nvSpPr>
-        <p:spPr>
-          <a:xfrm>
-            <a:off x="533400" y="1282700"/>
-            <a:ext cx="11125200" cy="38100"/>
-          </a:xfrm>
-          <a:prstGeom prst="rect">
-            <a:avLst/>
-          </a:prstGeom>
-          <a:solidFill>
-            <a:srgbClr val="2CB1BC"/>
-          </a:solidFill>
-          <a:ln w="19050" cap="flat" cmpd="sng" algn="ctr">
-            <a:noFill/>
-            <a:prstDash val="solid"/>
-            <a:miter lim="800000"/>
-          </a:ln>
-          <a:effectLst/>
-          <a:extLst>
-            <a:ext uri="{91240B29-F687-4F45-9708-019B960494DF}">
-              <a14:hiddenLine xmlns:a14="http://schemas.microsoft.com/office/drawing/2010/main" w="19050" cap="flat" cmpd="sng" algn="ctr">
-                <a:solidFill>
-                  <a:schemeClr val="accent1">
-                    <a:shade val="15000"/>
-                  </a:schemeClr>
-                </a:solidFill>
-                <a:prstDash val="solid"/>
-                <a:miter lim="800000"/>
-              </a14:hiddenLine>
-            </a:ext>
-          </a:extLst>
-        </p:spPr>
-        <p:style>
-          <a:lnRef idx="2">
-            <a:schemeClr val="accent1">
-              <a:shade val="15000"/>
-            </a:schemeClr>
-          </a:lnRef>
-          <a:fillRef idx="1">
-            <a:schemeClr val="accent1"/>
-          </a:fillRef>
-          <a:effectRef idx="0">
-            <a:schemeClr val="accent1"/>
-          </a:effectRef>
-          <a:fontRef idx="minor">
-            <a:schemeClr val="lt1"/>
-          </a:fontRef>
-        </p:style>
-        <p:txBody>
-          <a:bodyPr rtlCol="0" anchor="ctr"/>
-          <a:lstStyle/>
-          <a:p>
-            <a:pPr algn="ctr"/>
-            <a:endParaRPr lang="en-GB"/>
-          </a:p>
-        </p:txBody>
-      </p:sp>
-      <p:sp>
-        <p:nvSpPr>
-          <p:cNvPr id="5" name="Oval 4">
-            <a:extLst>
-              <a:ext uri="{FF2B5EF4-FFF2-40B4-BE49-F238E27FC236}">
-                <a16:creationId xmlns:a16="http://schemas.microsoft.com/office/drawing/2014/main" id="{637704DD-9627-93FF-7722-2479E96D422C}"/>
-              </a:ext>
-            </a:extLst>
-          </p:cNvPr>
-          <p:cNvSpPr/>
-          <p:nvPr/>
-        </p:nvSpPr>
-        <p:spPr>
-          <a:xfrm>
-            <a:off x="571500" y="1968500"/>
-            <a:ext cx="609600" cy="609600"/>
-          </a:xfrm>
-          <a:prstGeom prst="ellipse">
-            <a:avLst/>
-          </a:prstGeom>
-          <a:solidFill>
-            <a:srgbClr val="1976D2"/>
-          </a:solidFill>
-          <a:ln>
-            <a:solidFill>
-              <a:srgbClr val="1976D2"/>
-            </a:solidFill>
-          </a:ln>
-        </p:spPr>
-        <p:style>
-          <a:lnRef idx="2">
-            <a:schemeClr val="accent1">
-              <a:shade val="15000"/>
-            </a:schemeClr>
-          </a:lnRef>
-          <a:fillRef idx="1">
-            <a:schemeClr val="accent1"/>
-          </a:fillRef>
-          <a:effectRef idx="0">
-            <a:schemeClr val="accent1"/>
-          </a:effectRef>
-          <a:fontRef idx="minor">
-            <a:schemeClr val="lt1"/>
-          </a:fontRef>
-        </p:style>
-        <p:txBody>
-          <a:bodyPr rtlCol="0" anchor="ctr"/>
-          <a:lstStyle/>
-          <a:p>
-            <a:pPr algn="ctr"/>
-            <a:r>
-              <a:rPr lang="en-GB" sz="1600" b="1">
-                <a:solidFill>
-                  <a:srgbClr val="FFFFFF"/>
-                </a:solidFill>
-                <a:latin typeface="Aptos" panose="020B0004020202020204" pitchFamily="34" charset="0"/>
-              </a:rPr>
-              <a:t>1</a:t>
-            </a:r>
-          </a:p>
-        </p:txBody>
-      </p:sp>
-      <p:sp>
-        <p:nvSpPr>
-          <p:cNvPr id="6" name="Rectangle: Rounded Corners 5">
-            <a:extLst>
-              <a:ext uri="{FF2B5EF4-FFF2-40B4-BE49-F238E27FC236}">
-                <a16:creationId xmlns:a16="http://schemas.microsoft.com/office/drawing/2014/main" id="{66C76D12-12A4-452F-5514-DF367C88D133}"/>
-              </a:ext>
-            </a:extLst>
-          </p:cNvPr>
-          <p:cNvSpPr/>
-          <p:nvPr/>
-        </p:nvSpPr>
-        <p:spPr>
-          <a:xfrm>
-            <a:off x="1308100" y="1841500"/>
-            <a:ext cx="1778000" cy="863600"/>
-          </a:xfrm>
-          <a:prstGeom prst="roundRect">
-            <a:avLst/>
-          </a:prstGeom>
-          <a:solidFill>
-            <a:srgbClr val="FFFFFF"/>
-          </a:solidFill>
-          <a:ln w="15875">
-            <a:solidFill>
-              <a:srgbClr val="C8D6E2"/>
-            </a:solidFill>
-          </a:ln>
-        </p:spPr>
-        <p:style>
-          <a:lnRef idx="2">
-            <a:schemeClr val="accent1">
-              <a:shade val="15000"/>
-            </a:schemeClr>
-          </a:lnRef>
-          <a:fillRef idx="1">
-            <a:schemeClr val="accent1"/>
-          </a:fillRef>
-          <a:effectRef idx="0">
-            <a:schemeClr val="accent1"/>
-          </a:effectRef>
-          <a:fontRef idx="minor">
-            <a:schemeClr val="lt1"/>
-          </a:fontRef>
-        </p:style>
-        <p:txBody>
-          <a:bodyPr lIns="127000" tIns="63500" rIns="127000" bIns="63500" rtlCol="0" anchor="ctr"/>
-          <a:lstStyle/>
-          <a:p>
-            <a:pPr algn="ctr"/>
-            <a:r>
-              <a:rPr lang="en-GB" sz="1600" b="1">
-                <a:solidFill>
-                  <a:srgbClr val="16324F"/>
-                </a:solidFill>
-                <a:latin typeface="Aptos" panose="020B0004020202020204" pitchFamily="34" charset="0"/>
-              </a:rPr>
-              <a:t>Safety</a:t>
-            </a:r>
-          </a:p>
-        </p:txBody>
-      </p:sp>
-      <p:cxnSp>
-        <p:nvCxnSpPr>
-          <p:cNvPr id="7" name="Straight Arrow Connector 6">
-            <a:extLst>
-              <a:ext uri="{FF2B5EF4-FFF2-40B4-BE49-F238E27FC236}">
-                <a16:creationId xmlns:a16="http://schemas.microsoft.com/office/drawing/2014/main" id="{228AE575-08E3-752F-D8E2-97D0D8BC727E}"/>
-              </a:ext>
-            </a:extLst>
-          </p:cNvPr>
-          <p:cNvCxnSpPr/>
-          <p:nvPr/>
-        </p:nvCxnSpPr>
-        <p:spPr>
-          <a:xfrm>
-            <a:off x="3086100" y="2273300"/>
-            <a:ext cx="304800" cy="0"/>
-          </a:xfrm>
-          <a:prstGeom prst="straightConnector1">
-            <a:avLst/>
-          </a:prstGeom>
-          <a:ln w="25400">
-            <a:solidFill>
-              <a:srgbClr val="5C7084"/>
-            </a:solidFill>
-            <a:tailEnd type="arrow"/>
-          </a:ln>
-        </p:spPr>
-        <p:style>
-          <a:lnRef idx="2">
-            <a:schemeClr val="accent1"/>
-          </a:lnRef>
-          <a:fillRef idx="0">
-            <a:schemeClr val="accent1"/>
-          </a:fillRef>
-          <a:effectRef idx="1">
-            <a:schemeClr val="accent1"/>
-          </a:effectRef>
-          <a:fontRef idx="minor">
-            <a:schemeClr val="tx1"/>
-          </a:fontRef>
-        </p:style>
-      </p:cxnSp>
-      <p:sp>
-        <p:nvSpPr>
-          <p:cNvPr id="8" name="Oval 7">
-            <a:extLst>
-              <a:ext uri="{FF2B5EF4-FFF2-40B4-BE49-F238E27FC236}">
-                <a16:creationId xmlns:a16="http://schemas.microsoft.com/office/drawing/2014/main" id="{819B79B2-2243-84AF-E4D3-B655FDA6D84A}"/>
-              </a:ext>
-            </a:extLst>
-          </p:cNvPr>
-          <p:cNvSpPr/>
-          <p:nvPr/>
-        </p:nvSpPr>
-        <p:spPr>
-          <a:xfrm>
-            <a:off x="3467100" y="1968500"/>
-            <a:ext cx="609600" cy="609600"/>
-          </a:xfrm>
-          <a:prstGeom prst="ellipse">
-            <a:avLst/>
-          </a:prstGeom>
-          <a:solidFill>
-            <a:srgbClr val="1976D2"/>
-          </a:solidFill>
-          <a:ln>
-            <a:solidFill>
-              <a:srgbClr val="1976D2"/>
-            </a:solidFill>
-          </a:ln>
-        </p:spPr>
-        <p:style>
-          <a:lnRef idx="2">
-            <a:schemeClr val="accent1">
-              <a:shade val="15000"/>
-            </a:schemeClr>
-          </a:lnRef>
-          <a:fillRef idx="1">
-            <a:schemeClr val="accent1"/>
-          </a:fillRef>
-          <a:effectRef idx="0">
-            <a:schemeClr val="accent1"/>
-          </a:effectRef>
-          <a:fontRef idx="minor">
-            <a:schemeClr val="lt1"/>
-          </a:fontRef>
-        </p:style>
-        <p:txBody>
-          <a:bodyPr rtlCol="0" anchor="ctr"/>
-          <a:lstStyle/>
-          <a:p>
-            <a:pPr algn="ctr"/>
-            <a:r>
-              <a:rPr lang="en-GB" sz="1600" b="1">
-                <a:solidFill>
-                  <a:srgbClr val="FFFFFF"/>
-                </a:solidFill>
-                <a:latin typeface="Aptos" panose="020B0004020202020204" pitchFamily="34" charset="0"/>
-              </a:rPr>
-              <a:t>2</a:t>
-            </a:r>
-          </a:p>
-        </p:txBody>
-      </p:sp>
-      <p:sp>
-        <p:nvSpPr>
-          <p:cNvPr id="9" name="Rectangle: Rounded Corners 8">
-            <a:extLst>
-              <a:ext uri="{FF2B5EF4-FFF2-40B4-BE49-F238E27FC236}">
-                <a16:creationId xmlns:a16="http://schemas.microsoft.com/office/drawing/2014/main" id="{7534E9D1-1ECE-BE0D-790E-FAEC5072A482}"/>
-              </a:ext>
-            </a:extLst>
-          </p:cNvPr>
-          <p:cNvSpPr/>
-          <p:nvPr/>
-        </p:nvSpPr>
-        <p:spPr>
-          <a:xfrm>
-            <a:off x="4203700" y="1841500"/>
-            <a:ext cx="1778000" cy="863600"/>
-          </a:xfrm>
-          <a:prstGeom prst="roundRect">
-            <a:avLst/>
-          </a:prstGeom>
-          <a:solidFill>
-            <a:srgbClr val="FFFFFF"/>
-          </a:solidFill>
-          <a:ln w="15875">
-            <a:solidFill>
-              <a:srgbClr val="C8D6E2"/>
-            </a:solidFill>
-          </a:ln>
-        </p:spPr>
-        <p:style>
-          <a:lnRef idx="2">
-            <a:schemeClr val="accent1">
-              <a:shade val="15000"/>
-            </a:schemeClr>
-          </a:lnRef>
-          <a:fillRef idx="1">
-            <a:schemeClr val="accent1"/>
-          </a:fillRef>
-          <a:effectRef idx="0">
-            <a:schemeClr val="accent1"/>
-          </a:effectRef>
-          <a:fontRef idx="minor">
-            <a:schemeClr val="lt1"/>
-          </a:fontRef>
-        </p:style>
-        <p:txBody>
-          <a:bodyPr lIns="127000" tIns="63500" rIns="127000" bIns="63500" rtlCol="0" anchor="ctr"/>
-          <a:lstStyle/>
-          <a:p>
-            <a:pPr algn="ctr"/>
-            <a:r>
-              <a:rPr lang="en-GB" sz="1600" b="1">
-                <a:solidFill>
-                  <a:srgbClr val="16324F"/>
-                </a:solidFill>
-                <a:latin typeface="Aptos" panose="020B0004020202020204" pitchFamily="34" charset="0"/>
-              </a:rPr>
-              <a:t>Response</a:t>
-            </a:r>
-          </a:p>
-        </p:txBody>
-      </p:sp>
-      <p:cxnSp>
-        <p:nvCxnSpPr>
-          <p:cNvPr id="10" name="Straight Arrow Connector 9">
-            <a:extLst>
-              <a:ext uri="{FF2B5EF4-FFF2-40B4-BE49-F238E27FC236}">
-                <a16:creationId xmlns:a16="http://schemas.microsoft.com/office/drawing/2014/main" id="{D62426BE-19B7-09AD-C029-D17DFDBFFAF5}"/>
-              </a:ext>
-            </a:extLst>
-          </p:cNvPr>
-          <p:cNvCxnSpPr/>
-          <p:nvPr/>
-        </p:nvCxnSpPr>
-        <p:spPr>
-          <a:xfrm>
-            <a:off x="5981700" y="2273300"/>
-            <a:ext cx="304800" cy="0"/>
-          </a:xfrm>
-          <a:prstGeom prst="straightConnector1">
-            <a:avLst/>
-          </a:prstGeom>
-          <a:ln w="25400">
-            <a:solidFill>
-              <a:srgbClr val="5C7084"/>
-            </a:solidFill>
-            <a:tailEnd type="arrow"/>
-          </a:ln>
-        </p:spPr>
-        <p:style>
-          <a:lnRef idx="2">
-            <a:schemeClr val="accent1"/>
-          </a:lnRef>
-          <a:fillRef idx="0">
-            <a:schemeClr val="accent1"/>
-          </a:fillRef>
-          <a:effectRef idx="1">
-            <a:schemeClr val="accent1"/>
-          </a:effectRef>
-          <a:fontRef idx="minor">
-            <a:schemeClr val="tx1"/>
-          </a:fontRef>
-        </p:style>
-      </p:cxnSp>
-      <p:sp>
-        <p:nvSpPr>
-          <p:cNvPr id="11" name="Oval 10">
-            <a:extLst>
-              <a:ext uri="{FF2B5EF4-FFF2-40B4-BE49-F238E27FC236}">
-                <a16:creationId xmlns:a16="http://schemas.microsoft.com/office/drawing/2014/main" id="{89361CC4-8460-1D15-870E-43A011D102E3}"/>
-              </a:ext>
-            </a:extLst>
-          </p:cNvPr>
-          <p:cNvSpPr/>
-          <p:nvPr/>
-        </p:nvSpPr>
-        <p:spPr>
-          <a:xfrm>
-            <a:off x="6362700" y="1968500"/>
-            <a:ext cx="609600" cy="609600"/>
-          </a:xfrm>
-          <a:prstGeom prst="ellipse">
-            <a:avLst/>
-          </a:prstGeom>
-          <a:solidFill>
-            <a:srgbClr val="1976D2"/>
-          </a:solidFill>
-          <a:ln>
-            <a:solidFill>
-              <a:srgbClr val="1976D2"/>
-            </a:solidFill>
-          </a:ln>
-        </p:spPr>
-        <p:style>
-          <a:lnRef idx="2">
-            <a:schemeClr val="accent1">
-              <a:shade val="15000"/>
-            </a:schemeClr>
-          </a:lnRef>
-          <a:fillRef idx="1">
-            <a:schemeClr val="accent1"/>
-          </a:fillRef>
-          <a:effectRef idx="0">
-            <a:schemeClr val="accent1"/>
-          </a:effectRef>
-          <a:fontRef idx="minor">
-            <a:schemeClr val="lt1"/>
-          </a:fontRef>
-        </p:style>
-        <p:txBody>
-          <a:bodyPr rtlCol="0" anchor="ctr"/>
-          <a:lstStyle/>
-          <a:p>
-            <a:pPr algn="ctr"/>
-            <a:r>
-              <a:rPr lang="en-GB" sz="1600" b="1">
-                <a:solidFill>
-                  <a:srgbClr val="FFFFFF"/>
-                </a:solidFill>
-                <a:latin typeface="Aptos" panose="020B0004020202020204" pitchFamily="34" charset="0"/>
-              </a:rPr>
-              <a:t>3</a:t>
-            </a:r>
-          </a:p>
-        </p:txBody>
-      </p:sp>
-      <p:sp>
-        <p:nvSpPr>
-          <p:cNvPr id="12" name="Rectangle: Rounded Corners 11">
-            <a:extLst>
-              <a:ext uri="{FF2B5EF4-FFF2-40B4-BE49-F238E27FC236}">
-                <a16:creationId xmlns:a16="http://schemas.microsoft.com/office/drawing/2014/main" id="{6D772684-041C-EB24-DCD9-51452D4733F9}"/>
-              </a:ext>
-            </a:extLst>
-          </p:cNvPr>
-          <p:cNvSpPr/>
-          <p:nvPr/>
-        </p:nvSpPr>
-        <p:spPr>
-          <a:xfrm>
-            <a:off x="7099300" y="1841500"/>
-            <a:ext cx="1778000" cy="863600"/>
-          </a:xfrm>
-          <a:prstGeom prst="roundRect">
-            <a:avLst/>
-          </a:prstGeom>
-          <a:solidFill>
-            <a:srgbClr val="FFFFFF"/>
-          </a:solidFill>
-          <a:ln w="15875">
-            <a:solidFill>
-              <a:srgbClr val="C8D6E2"/>
-            </a:solidFill>
-          </a:ln>
-        </p:spPr>
-        <p:style>
-          <a:lnRef idx="2">
-            <a:schemeClr val="accent1">
-              <a:shade val="15000"/>
-            </a:schemeClr>
-          </a:lnRef>
-          <a:fillRef idx="1">
-            <a:schemeClr val="accent1"/>
-          </a:fillRef>
-          <a:effectRef idx="0">
-            <a:schemeClr val="accent1"/>
-          </a:effectRef>
-          <a:fontRef idx="minor">
-            <a:schemeClr val="lt1"/>
-          </a:fontRef>
-        </p:style>
-        <p:txBody>
-          <a:bodyPr lIns="127000" tIns="63500" rIns="127000" bIns="63500" rtlCol="0" anchor="ctr"/>
-          <a:lstStyle/>
-          <a:p>
-            <a:pPr algn="ctr"/>
-            <a:r>
-              <a:rPr lang="en-GB" sz="1600" b="1">
-                <a:solidFill>
-                  <a:srgbClr val="16324F"/>
-                </a:solidFill>
-                <a:latin typeface="Aptos" panose="020B0004020202020204" pitchFamily="34" charset="0"/>
-              </a:rPr>
-              <a:t>Call 112</a:t>
-            </a:r>
-          </a:p>
-        </p:txBody>
-      </p:sp>
-      <p:cxnSp>
-        <p:nvCxnSpPr>
-          <p:cNvPr id="13" name="Straight Arrow Connector 12">
-            <a:extLst>
-              <a:ext uri="{FF2B5EF4-FFF2-40B4-BE49-F238E27FC236}">
-                <a16:creationId xmlns:a16="http://schemas.microsoft.com/office/drawing/2014/main" id="{5A399AC0-4239-0967-60A0-FF4D5F89361A}"/>
-              </a:ext>
-            </a:extLst>
-          </p:cNvPr>
-          <p:cNvCxnSpPr/>
-          <p:nvPr/>
-        </p:nvCxnSpPr>
-        <p:spPr>
-          <a:xfrm>
-            <a:off x="8877300" y="2273300"/>
-            <a:ext cx="304800" cy="0"/>
-          </a:xfrm>
-          <a:prstGeom prst="straightConnector1">
-            <a:avLst/>
-          </a:prstGeom>
-          <a:ln w="25400">
-            <a:solidFill>
-              <a:srgbClr val="5C7084"/>
-            </a:solidFill>
-            <a:tailEnd type="arrow"/>
-          </a:ln>
-        </p:spPr>
-        <p:style>
-          <a:lnRef idx="2">
-            <a:schemeClr val="accent1"/>
-          </a:lnRef>
-          <a:fillRef idx="0">
-            <a:schemeClr val="accent1"/>
-          </a:fillRef>
-          <a:effectRef idx="1">
-            <a:schemeClr val="accent1"/>
-          </a:effectRef>
-          <a:fontRef idx="minor">
-            <a:schemeClr val="tx1"/>
-          </a:fontRef>
-        </p:style>
-      </p:cxnSp>
-      <p:sp>
-        <p:nvSpPr>
-          <p:cNvPr id="14" name="Oval 13">
-            <a:extLst>
-              <a:ext uri="{FF2B5EF4-FFF2-40B4-BE49-F238E27FC236}">
-                <a16:creationId xmlns:a16="http://schemas.microsoft.com/office/drawing/2014/main" id="{8ACEFCC8-353D-5583-772E-FBC851F79DC0}"/>
-              </a:ext>
-            </a:extLst>
-          </p:cNvPr>
-          <p:cNvSpPr/>
-          <p:nvPr/>
-        </p:nvSpPr>
-        <p:spPr>
-          <a:xfrm>
-            <a:off x="9258300" y="1968500"/>
-            <a:ext cx="609600" cy="609600"/>
-          </a:xfrm>
-          <a:prstGeom prst="ellipse">
-            <a:avLst/>
-          </a:prstGeom>
-          <a:solidFill>
-            <a:srgbClr val="1976D2"/>
-          </a:solidFill>
-          <a:ln>
-            <a:solidFill>
-              <a:srgbClr val="1976D2"/>
-            </a:solidFill>
-          </a:ln>
-        </p:spPr>
-        <p:style>
-          <a:lnRef idx="2">
-            <a:schemeClr val="accent1">
-              <a:shade val="15000"/>
-            </a:schemeClr>
-          </a:lnRef>
-          <a:fillRef idx="1">
-            <a:schemeClr val="accent1"/>
-          </a:fillRef>
-          <a:effectRef idx="0">
-            <a:schemeClr val="accent1"/>
-          </a:effectRef>
-          <a:fontRef idx="minor">
-            <a:schemeClr val="lt1"/>
-          </a:fontRef>
-        </p:style>
-        <p:txBody>
-          <a:bodyPr rtlCol="0" anchor="ctr"/>
-          <a:lstStyle/>
-          <a:p>
-            <a:pPr algn="ctr"/>
-            <a:r>
-              <a:rPr lang="en-GB" sz="1600" b="1">
-                <a:solidFill>
-                  <a:srgbClr val="FFFFFF"/>
-                </a:solidFill>
-                <a:latin typeface="Aptos" panose="020B0004020202020204" pitchFamily="34" charset="0"/>
-              </a:rPr>
-              <a:t>4</a:t>
-            </a:r>
-          </a:p>
-        </p:txBody>
-      </p:sp>
-      <p:sp>
-        <p:nvSpPr>
-          <p:cNvPr id="15" name="Rectangle: Rounded Corners 14">
-            <a:extLst>
-              <a:ext uri="{FF2B5EF4-FFF2-40B4-BE49-F238E27FC236}">
-                <a16:creationId xmlns:a16="http://schemas.microsoft.com/office/drawing/2014/main" id="{6CF208E1-A43F-8760-A6BA-C0AE5E4D7098}"/>
-              </a:ext>
-            </a:extLst>
-          </p:cNvPr>
-          <p:cNvSpPr/>
-          <p:nvPr/>
-        </p:nvSpPr>
-        <p:spPr>
-          <a:xfrm>
-            <a:off x="9994900" y="1841500"/>
-            <a:ext cx="1778000" cy="863600"/>
-          </a:xfrm>
-          <a:prstGeom prst="roundRect">
-            <a:avLst/>
-          </a:prstGeom>
-          <a:solidFill>
-            <a:srgbClr val="FFFFFF"/>
-          </a:solidFill>
-          <a:ln w="15875">
-            <a:solidFill>
-              <a:srgbClr val="C8D6E2"/>
-            </a:solidFill>
-          </a:ln>
-        </p:spPr>
-        <p:style>
-          <a:lnRef idx="2">
-            <a:schemeClr val="accent1">
-              <a:shade val="15000"/>
-            </a:schemeClr>
-          </a:lnRef>
-          <a:fillRef idx="1">
-            <a:schemeClr val="accent1"/>
-          </a:fillRef>
-          <a:effectRef idx="0">
-            <a:schemeClr val="accent1"/>
-          </a:effectRef>
-          <a:fontRef idx="minor">
-            <a:schemeClr val="lt1"/>
-          </a:fontRef>
-        </p:style>
-        <p:txBody>
-          <a:bodyPr lIns="127000" tIns="63500" rIns="127000" bIns="63500" rtlCol="0" anchor="ctr"/>
-          <a:lstStyle/>
-          <a:p>
-            <a:pPr algn="ctr"/>
-            <a:r>
-              <a:rPr lang="en-GB" sz="1600" b="1">
-                <a:solidFill>
-                  <a:srgbClr val="16324F"/>
-                </a:solidFill>
-                <a:latin typeface="Aptos" panose="020B0004020202020204" pitchFamily="34" charset="0"/>
-              </a:rPr>
-              <a:t>Breathing</a:t>
-            </a:r>
-          </a:p>
-        </p:txBody>
-      </p:sp>
-      <p:sp>
-        <p:nvSpPr>
-          <p:cNvPr id="16" name="Oval 15">
-            <a:extLst>
-              <a:ext uri="{FF2B5EF4-FFF2-40B4-BE49-F238E27FC236}">
-                <a16:creationId xmlns:a16="http://schemas.microsoft.com/office/drawing/2014/main" id="{B863C3BC-2445-CF56-8BBD-EEEDC90EF80C}"/>
-              </a:ext>
-            </a:extLst>
-          </p:cNvPr>
-          <p:cNvSpPr/>
-          <p:nvPr/>
-        </p:nvSpPr>
-        <p:spPr>
-          <a:xfrm>
-            <a:off x="571500" y="3644900"/>
-            <a:ext cx="609600" cy="609600"/>
-          </a:xfrm>
-          <a:prstGeom prst="ellipse">
-            <a:avLst/>
-          </a:prstGeom>
-          <a:solidFill>
-            <a:srgbClr val="27AE60"/>
-          </a:solidFill>
-          <a:ln>
-            <a:solidFill>
-              <a:srgbClr val="27AE60"/>
-            </a:solidFill>
-          </a:ln>
-        </p:spPr>
-        <p:style>
-          <a:lnRef idx="2">
-            <a:schemeClr val="accent1">
-              <a:shade val="15000"/>
-            </a:schemeClr>
-          </a:lnRef>
-          <a:fillRef idx="1">
-            <a:schemeClr val="accent1"/>
-          </a:fillRef>
-          <a:effectRef idx="0">
-            <a:schemeClr val="accent1"/>
-          </a:effectRef>
-          <a:fontRef idx="minor">
-            <a:schemeClr val="lt1"/>
-          </a:fontRef>
-        </p:style>
-        <p:txBody>
-          <a:bodyPr rtlCol="0" anchor="ctr"/>
-          <a:lstStyle/>
-          <a:p>
-            <a:pPr algn="ctr"/>
-            <a:r>
-              <a:rPr lang="en-GB" sz="1600" b="1">
-                <a:solidFill>
-                  <a:srgbClr val="FFFFFF"/>
-                </a:solidFill>
-                <a:latin typeface="Aptos" panose="020B0004020202020204" pitchFamily="34" charset="0"/>
-              </a:rPr>
-              <a:t>5</a:t>
-            </a:r>
-          </a:p>
-        </p:txBody>
-      </p:sp>
-      <p:sp>
-        <p:nvSpPr>
-          <p:cNvPr id="17" name="Rectangle: Rounded Corners 16">
-            <a:extLst>
-              <a:ext uri="{FF2B5EF4-FFF2-40B4-BE49-F238E27FC236}">
-                <a16:creationId xmlns:a16="http://schemas.microsoft.com/office/drawing/2014/main" id="{4215FBA7-5AF1-BD01-2D7D-38ED3A8125C4}"/>
-              </a:ext>
-            </a:extLst>
-          </p:cNvPr>
-          <p:cNvSpPr/>
-          <p:nvPr/>
-        </p:nvSpPr>
-        <p:spPr>
-          <a:xfrm>
-            <a:off x="1308100" y="3517900"/>
-            <a:ext cx="1778000" cy="863600"/>
-          </a:xfrm>
-          <a:prstGeom prst="roundRect">
-            <a:avLst/>
-          </a:prstGeom>
-          <a:solidFill>
-            <a:srgbClr val="FFFFFF"/>
-          </a:solidFill>
-          <a:ln w="15875">
-            <a:solidFill>
-              <a:srgbClr val="C8D6E2"/>
-            </a:solidFill>
-          </a:ln>
-        </p:spPr>
-        <p:style>
-          <a:lnRef idx="2">
-            <a:schemeClr val="accent1">
-              <a:shade val="15000"/>
-            </a:schemeClr>
-          </a:lnRef>
-          <a:fillRef idx="1">
-            <a:schemeClr val="accent1"/>
-          </a:fillRef>
-          <a:effectRef idx="0">
-            <a:schemeClr val="accent1"/>
-          </a:effectRef>
-          <a:fontRef idx="minor">
-            <a:schemeClr val="lt1"/>
-          </a:fontRef>
-        </p:style>
-        <p:txBody>
-          <a:bodyPr lIns="127000" tIns="63500" rIns="127000" bIns="63500" rtlCol="0" anchor="ctr"/>
-          <a:lstStyle/>
-          <a:p>
-            <a:pPr algn="ctr"/>
-            <a:r>
-              <a:rPr lang="en-GB" sz="1600" b="1">
-                <a:solidFill>
-                  <a:srgbClr val="16324F"/>
-                </a:solidFill>
-                <a:latin typeface="Aptos" panose="020B0004020202020204" pitchFamily="34" charset="0"/>
-              </a:rPr>
-              <a:t>Compress</a:t>
-            </a:r>
-          </a:p>
-        </p:txBody>
-      </p:sp>
-      <p:cxnSp>
-        <p:nvCxnSpPr>
-          <p:cNvPr id="18" name="Straight Arrow Connector 17">
-            <a:extLst>
-              <a:ext uri="{FF2B5EF4-FFF2-40B4-BE49-F238E27FC236}">
-                <a16:creationId xmlns:a16="http://schemas.microsoft.com/office/drawing/2014/main" id="{E73437FC-2DF0-C5E8-0476-CBE333227CF4}"/>
-              </a:ext>
-            </a:extLst>
-          </p:cNvPr>
-          <p:cNvCxnSpPr/>
-          <p:nvPr/>
-        </p:nvCxnSpPr>
-        <p:spPr>
-          <a:xfrm>
-            <a:off x="3086100" y="3949700"/>
-            <a:ext cx="304800" cy="0"/>
-          </a:xfrm>
-          <a:prstGeom prst="straightConnector1">
-            <a:avLst/>
-          </a:prstGeom>
-          <a:ln w="25400">
-            <a:solidFill>
-              <a:srgbClr val="5C7084"/>
-            </a:solidFill>
-            <a:tailEnd type="arrow"/>
-          </a:ln>
-        </p:spPr>
-        <p:style>
-          <a:lnRef idx="2">
-            <a:schemeClr val="accent1"/>
-          </a:lnRef>
-          <a:fillRef idx="0">
-            <a:schemeClr val="accent1"/>
-          </a:fillRef>
-          <a:effectRef idx="1">
-            <a:schemeClr val="accent1"/>
-          </a:effectRef>
-          <a:fontRef idx="minor">
-            <a:schemeClr val="tx1"/>
-          </a:fontRef>
-        </p:style>
-      </p:cxnSp>
-      <p:sp>
-        <p:nvSpPr>
-          <p:cNvPr id="19" name="Oval 18">
-            <a:extLst>
-              <a:ext uri="{FF2B5EF4-FFF2-40B4-BE49-F238E27FC236}">
-                <a16:creationId xmlns:a16="http://schemas.microsoft.com/office/drawing/2014/main" id="{F4EEF9E2-88F8-E792-A6A5-ED911FD02E86}"/>
-              </a:ext>
-            </a:extLst>
-          </p:cNvPr>
-          <p:cNvSpPr/>
-          <p:nvPr/>
-        </p:nvSpPr>
-        <p:spPr>
-          <a:xfrm>
-            <a:off x="3467100" y="3644900"/>
-            <a:ext cx="609600" cy="609600"/>
-          </a:xfrm>
-          <a:prstGeom prst="ellipse">
-            <a:avLst/>
-          </a:prstGeom>
-          <a:solidFill>
-            <a:srgbClr val="27AE60"/>
-          </a:solidFill>
-          <a:ln>
-            <a:solidFill>
-              <a:srgbClr val="27AE60"/>
-            </a:solidFill>
-          </a:ln>
-        </p:spPr>
-        <p:style>
-          <a:lnRef idx="2">
-            <a:schemeClr val="accent1">
-              <a:shade val="15000"/>
-            </a:schemeClr>
-          </a:lnRef>
-          <a:fillRef idx="1">
-            <a:schemeClr val="accent1"/>
-          </a:fillRef>
-          <a:effectRef idx="0">
-            <a:schemeClr val="accent1"/>
-          </a:effectRef>
-          <a:fontRef idx="minor">
-            <a:schemeClr val="lt1"/>
-          </a:fontRef>
-        </p:style>
-        <p:txBody>
-          <a:bodyPr rtlCol="0" anchor="ctr"/>
-          <a:lstStyle/>
-          <a:p>
-            <a:pPr algn="ctr"/>
-            <a:r>
-              <a:rPr lang="en-GB" sz="1600" b="1">
-                <a:solidFill>
-                  <a:srgbClr val="FFFFFF"/>
-                </a:solidFill>
-                <a:latin typeface="Aptos" panose="020B0004020202020204" pitchFamily="34" charset="0"/>
-              </a:rPr>
-              <a:t>6</a:t>
-            </a:r>
-          </a:p>
-        </p:txBody>
-      </p:sp>
-      <p:sp>
-        <p:nvSpPr>
-          <p:cNvPr id="20" name="Rectangle: Rounded Corners 19">
-            <a:extLst>
-              <a:ext uri="{FF2B5EF4-FFF2-40B4-BE49-F238E27FC236}">
-                <a16:creationId xmlns:a16="http://schemas.microsoft.com/office/drawing/2014/main" id="{177A2CBC-5591-F12A-3ED4-6EDA25FEA41A}"/>
-              </a:ext>
-            </a:extLst>
-          </p:cNvPr>
-          <p:cNvSpPr/>
-          <p:nvPr/>
-        </p:nvSpPr>
-        <p:spPr>
-          <a:xfrm>
-            <a:off x="4203700" y="3517900"/>
-            <a:ext cx="1778000" cy="863600"/>
-          </a:xfrm>
-          <a:prstGeom prst="roundRect">
-            <a:avLst/>
-          </a:prstGeom>
-          <a:solidFill>
-            <a:srgbClr val="FFFFFF"/>
-          </a:solidFill>
-          <a:ln w="15875">
-            <a:solidFill>
-              <a:srgbClr val="C8D6E2"/>
-            </a:solidFill>
-          </a:ln>
-        </p:spPr>
-        <p:style>
-          <a:lnRef idx="2">
-            <a:schemeClr val="accent1">
-              <a:shade val="15000"/>
-            </a:schemeClr>
-          </a:lnRef>
-          <a:fillRef idx="1">
-            <a:schemeClr val="accent1"/>
-          </a:fillRef>
-          <a:effectRef idx="0">
-            <a:schemeClr val="accent1"/>
-          </a:effectRef>
-          <a:fontRef idx="minor">
-            <a:schemeClr val="lt1"/>
-          </a:fontRef>
-        </p:style>
-        <p:txBody>
-          <a:bodyPr lIns="127000" tIns="63500" rIns="127000" bIns="63500" rtlCol="0" anchor="ctr"/>
-          <a:lstStyle/>
-          <a:p>
-            <a:pPr algn="ctr"/>
-            <a:r>
-              <a:rPr lang="en-GB" sz="1600" b="1">
-                <a:solidFill>
-                  <a:srgbClr val="16324F"/>
-                </a:solidFill>
-                <a:latin typeface="Aptos" panose="020B0004020202020204" pitchFamily="34" charset="0"/>
-              </a:rPr>
-              <a:t>AED</a:t>
-            </a:r>
-          </a:p>
-        </p:txBody>
-      </p:sp>
-      <p:cxnSp>
-        <p:nvCxnSpPr>
-          <p:cNvPr id="21" name="Straight Arrow Connector 20">
-            <a:extLst>
-              <a:ext uri="{FF2B5EF4-FFF2-40B4-BE49-F238E27FC236}">
-                <a16:creationId xmlns:a16="http://schemas.microsoft.com/office/drawing/2014/main" id="{C2D38697-27DA-FBFE-45F1-3E63B826F23D}"/>
-              </a:ext>
-            </a:extLst>
-          </p:cNvPr>
-          <p:cNvCxnSpPr/>
-          <p:nvPr/>
-        </p:nvCxnSpPr>
-        <p:spPr>
-          <a:xfrm>
-            <a:off x="5981700" y="3949700"/>
-            <a:ext cx="304800" cy="0"/>
-          </a:xfrm>
-          <a:prstGeom prst="straightConnector1">
-            <a:avLst/>
-          </a:prstGeom>
-          <a:ln w="25400">
-            <a:solidFill>
-              <a:srgbClr val="5C7084"/>
-            </a:solidFill>
-            <a:tailEnd type="arrow"/>
-          </a:ln>
-        </p:spPr>
-        <p:style>
-          <a:lnRef idx="2">
-            <a:schemeClr val="accent1"/>
-          </a:lnRef>
-          <a:fillRef idx="0">
-            <a:schemeClr val="accent1"/>
-          </a:fillRef>
-          <a:effectRef idx="1">
-            <a:schemeClr val="accent1"/>
-          </a:effectRef>
-          <a:fontRef idx="minor">
-            <a:schemeClr val="tx1"/>
-          </a:fontRef>
-        </p:style>
-      </p:cxnSp>
-      <p:sp>
-        <p:nvSpPr>
-          <p:cNvPr id="22" name="Oval 21">
-            <a:extLst>
-              <a:ext uri="{FF2B5EF4-FFF2-40B4-BE49-F238E27FC236}">
-                <a16:creationId xmlns:a16="http://schemas.microsoft.com/office/drawing/2014/main" id="{4CA9BEC3-532B-BFEA-321F-CDA89C3068C6}"/>
-              </a:ext>
-            </a:extLst>
-          </p:cNvPr>
-          <p:cNvSpPr/>
-          <p:nvPr/>
-        </p:nvSpPr>
-        <p:spPr>
-          <a:xfrm>
-            <a:off x="6362700" y="3644900"/>
-            <a:ext cx="609600" cy="609600"/>
-          </a:xfrm>
-          <a:prstGeom prst="ellipse">
-            <a:avLst/>
-          </a:prstGeom>
-          <a:solidFill>
-            <a:srgbClr val="27AE60"/>
-          </a:solidFill>
-          <a:ln>
-            <a:solidFill>
-              <a:srgbClr val="27AE60"/>
-            </a:solidFill>
-          </a:ln>
-        </p:spPr>
-        <p:style>
-          <a:lnRef idx="2">
-            <a:schemeClr val="accent1">
-              <a:shade val="15000"/>
-            </a:schemeClr>
-          </a:lnRef>
-          <a:fillRef idx="1">
-            <a:schemeClr val="accent1"/>
-          </a:fillRef>
-          <a:effectRef idx="0">
-            <a:schemeClr val="accent1"/>
-          </a:effectRef>
-          <a:fontRef idx="minor">
-            <a:schemeClr val="lt1"/>
-          </a:fontRef>
-        </p:style>
-        <p:txBody>
-          <a:bodyPr rtlCol="0" anchor="ctr"/>
-          <a:lstStyle/>
-          <a:p>
-            <a:pPr algn="ctr"/>
-            <a:r>
-              <a:rPr lang="en-GB" sz="1600" b="1">
-                <a:solidFill>
-                  <a:srgbClr val="FFFFFF"/>
-                </a:solidFill>
-                <a:latin typeface="Aptos" panose="020B0004020202020204" pitchFamily="34" charset="0"/>
-              </a:rPr>
-              <a:t>7</a:t>
-            </a:r>
-          </a:p>
-        </p:txBody>
-      </p:sp>
-      <p:sp>
-        <p:nvSpPr>
-          <p:cNvPr id="23" name="Rectangle: Rounded Corners 22">
-            <a:extLst>
-              <a:ext uri="{FF2B5EF4-FFF2-40B4-BE49-F238E27FC236}">
-                <a16:creationId xmlns:a16="http://schemas.microsoft.com/office/drawing/2014/main" id="{EBB92A85-2382-1FE1-7D11-EF630873D31B}"/>
-              </a:ext>
-            </a:extLst>
-          </p:cNvPr>
-          <p:cNvSpPr/>
-          <p:nvPr/>
-        </p:nvSpPr>
-        <p:spPr>
-          <a:xfrm>
-            <a:off x="7099300" y="3517900"/>
-            <a:ext cx="1778000" cy="863600"/>
-          </a:xfrm>
-          <a:prstGeom prst="roundRect">
-            <a:avLst/>
-          </a:prstGeom>
-          <a:solidFill>
-            <a:srgbClr val="FFFFFF"/>
-          </a:solidFill>
-          <a:ln w="15875">
-            <a:solidFill>
-              <a:srgbClr val="C8D6E2"/>
-            </a:solidFill>
-          </a:ln>
-        </p:spPr>
-        <p:style>
-          <a:lnRef idx="2">
-            <a:schemeClr val="accent1">
-              <a:shade val="15000"/>
-            </a:schemeClr>
-          </a:lnRef>
-          <a:fillRef idx="1">
-            <a:schemeClr val="accent1"/>
-          </a:fillRef>
-          <a:effectRef idx="0">
-            <a:schemeClr val="accent1"/>
-          </a:effectRef>
-          <a:fontRef idx="minor">
-            <a:schemeClr val="lt1"/>
-          </a:fontRef>
-        </p:style>
-        <p:txBody>
-          <a:bodyPr lIns="127000" tIns="63500" rIns="127000" bIns="63500" rtlCol="0" anchor="ctr"/>
-          <a:lstStyle/>
-          <a:p>
-            <a:pPr algn="ctr"/>
-            <a:r>
-              <a:rPr lang="en-GB" sz="1600" b="1">
-                <a:solidFill>
-                  <a:srgbClr val="16324F"/>
-                </a:solidFill>
-                <a:latin typeface="Aptos" panose="020B0004020202020204" pitchFamily="34" charset="0"/>
-              </a:rPr>
-              <a:t>Resume</a:t>
-            </a:r>
-          </a:p>
-        </p:txBody>
-      </p:sp>
-      <p:cxnSp>
-        <p:nvCxnSpPr>
-          <p:cNvPr id="24" name="Straight Arrow Connector 23">
-            <a:extLst>
-              <a:ext uri="{FF2B5EF4-FFF2-40B4-BE49-F238E27FC236}">
-                <a16:creationId xmlns:a16="http://schemas.microsoft.com/office/drawing/2014/main" id="{468806B6-458A-4506-ECEE-98FF800E618F}"/>
-              </a:ext>
-            </a:extLst>
-          </p:cNvPr>
-          <p:cNvCxnSpPr/>
-          <p:nvPr/>
-        </p:nvCxnSpPr>
-        <p:spPr>
-          <a:xfrm>
-            <a:off x="8877300" y="3949700"/>
-            <a:ext cx="304800" cy="0"/>
-          </a:xfrm>
-          <a:prstGeom prst="straightConnector1">
-            <a:avLst/>
-          </a:prstGeom>
-          <a:ln w="25400">
-            <a:solidFill>
-              <a:srgbClr val="5C7084"/>
-            </a:solidFill>
-            <a:tailEnd type="arrow"/>
-          </a:ln>
-        </p:spPr>
-        <p:style>
-          <a:lnRef idx="2">
-            <a:schemeClr val="accent1"/>
-          </a:lnRef>
-          <a:fillRef idx="0">
-            <a:schemeClr val="accent1"/>
-          </a:fillRef>
-          <a:effectRef idx="1">
-            <a:schemeClr val="accent1"/>
-          </a:effectRef>
-          <a:fontRef idx="minor">
-            <a:schemeClr val="tx1"/>
-          </a:fontRef>
-        </p:style>
-      </p:cxnSp>
-      <p:sp>
-        <p:nvSpPr>
-          <p:cNvPr id="25" name="Oval 24">
-            <a:extLst>
-              <a:ext uri="{FF2B5EF4-FFF2-40B4-BE49-F238E27FC236}">
-                <a16:creationId xmlns:a16="http://schemas.microsoft.com/office/drawing/2014/main" id="{CCB4C292-2A57-0375-ACFB-CB1AE952134A}"/>
-              </a:ext>
-            </a:extLst>
-          </p:cNvPr>
-          <p:cNvSpPr/>
-          <p:nvPr/>
-        </p:nvSpPr>
-        <p:spPr>
-          <a:xfrm>
-            <a:off x="9258300" y="3644900"/>
-            <a:ext cx="609600" cy="609600"/>
-          </a:xfrm>
-          <a:prstGeom prst="ellipse">
-            <a:avLst/>
-          </a:prstGeom>
-          <a:solidFill>
-            <a:srgbClr val="27AE60"/>
-          </a:solidFill>
-          <a:ln>
-            <a:solidFill>
-              <a:srgbClr val="27AE60"/>
-            </a:solidFill>
-          </a:ln>
-        </p:spPr>
-        <p:style>
-          <a:lnRef idx="2">
-            <a:schemeClr val="accent1">
-              <a:shade val="15000"/>
-            </a:schemeClr>
-          </a:lnRef>
-          <a:fillRef idx="1">
-            <a:schemeClr val="accent1"/>
-          </a:fillRef>
-          <a:effectRef idx="0">
-            <a:schemeClr val="accent1"/>
-          </a:effectRef>
-          <a:fontRef idx="minor">
-            <a:schemeClr val="lt1"/>
-          </a:fontRef>
-        </p:style>
-        <p:txBody>
-          <a:bodyPr rtlCol="0" anchor="ctr"/>
-          <a:lstStyle/>
-          <a:p>
-            <a:pPr algn="ctr"/>
-            <a:r>
-              <a:rPr lang="en-GB" sz="1600" b="1">
-                <a:solidFill>
-                  <a:srgbClr val="FFFFFF"/>
-                </a:solidFill>
-                <a:latin typeface="Aptos" panose="020B0004020202020204" pitchFamily="34" charset="0"/>
-              </a:rPr>
-              <a:t>8</a:t>
-            </a:r>
-          </a:p>
-        </p:txBody>
-      </p:sp>
-      <p:sp>
-        <p:nvSpPr>
-          <p:cNvPr id="26" name="Rectangle: Rounded Corners 25">
-            <a:extLst>
-              <a:ext uri="{FF2B5EF4-FFF2-40B4-BE49-F238E27FC236}">
-                <a16:creationId xmlns:a16="http://schemas.microsoft.com/office/drawing/2014/main" id="{46BAD980-25B3-7E1A-F37E-406BFCAA2C6F}"/>
-              </a:ext>
-            </a:extLst>
-          </p:cNvPr>
-          <p:cNvSpPr/>
-          <p:nvPr/>
-        </p:nvSpPr>
-        <p:spPr>
-          <a:xfrm>
-            <a:off x="9994900" y="3517900"/>
-            <a:ext cx="1778000" cy="863600"/>
-          </a:xfrm>
-          <a:prstGeom prst="roundRect">
-            <a:avLst/>
-          </a:prstGeom>
-          <a:solidFill>
-            <a:srgbClr val="FFFFFF"/>
-          </a:solidFill>
-          <a:ln w="15875">
-            <a:solidFill>
-              <a:srgbClr val="C8D6E2"/>
-            </a:solidFill>
-          </a:ln>
-        </p:spPr>
-        <p:style>
-          <a:lnRef idx="2">
-            <a:schemeClr val="accent1">
-              <a:shade val="15000"/>
-            </a:schemeClr>
-          </a:lnRef>
-          <a:fillRef idx="1">
-            <a:schemeClr val="accent1"/>
-          </a:fillRef>
-          <a:effectRef idx="0">
-            <a:schemeClr val="accent1"/>
-          </a:effectRef>
-          <a:fontRef idx="minor">
-            <a:schemeClr val="lt1"/>
-          </a:fontRef>
-        </p:style>
-        <p:txBody>
-          <a:bodyPr lIns="127000" tIns="63500" rIns="127000" bIns="63500" rtlCol="0" anchor="ctr"/>
-          <a:lstStyle/>
-          <a:p>
-            <a:pPr algn="ctr"/>
-            <a:r>
-              <a:rPr lang="en-GB" sz="1600" b="1">
-                <a:solidFill>
-                  <a:srgbClr val="16324F"/>
-                </a:solidFill>
-                <a:latin typeface="Aptos" panose="020B0004020202020204" pitchFamily="34" charset="0"/>
-              </a:rPr>
-              <a:t>Handover</a:t>
-            </a:r>
-          </a:p>
-        </p:txBody>
-      </p:sp>
-      <p:sp>
-        <p:nvSpPr>
-          <p:cNvPr id="27" name="Rectangle: Rounded Corners 26">
-            <a:extLst>
-              <a:ext uri="{FF2B5EF4-FFF2-40B4-BE49-F238E27FC236}">
-                <a16:creationId xmlns:a16="http://schemas.microsoft.com/office/drawing/2014/main" id="{7ADB8AB8-8269-1C2B-A91A-057131A3D0AD}"/>
-              </a:ext>
-            </a:extLst>
-          </p:cNvPr>
-          <p:cNvSpPr/>
-          <p:nvPr/>
-        </p:nvSpPr>
-        <p:spPr>
-          <a:xfrm>
-            <a:off x="2286000" y="5029200"/>
-            <a:ext cx="7620000" cy="609600"/>
-          </a:xfrm>
-          <a:prstGeom prst="roundRect">
-            <a:avLst/>
-          </a:prstGeom>
-          <a:solidFill>
-            <a:srgbClr val="102A43"/>
-          </a:solidFill>
-          <a:ln w="15875">
-            <a:solidFill>
-              <a:srgbClr val="102A43"/>
-            </a:solidFill>
-          </a:ln>
-        </p:spPr>
-        <p:style>
-          <a:lnRef idx="2">
-            <a:schemeClr val="accent1">
-              <a:shade val="15000"/>
-            </a:schemeClr>
-          </a:lnRef>
-          <a:fillRef idx="1">
-            <a:schemeClr val="accent1"/>
-          </a:fillRef>
-          <a:effectRef idx="0">
-            <a:schemeClr val="accent1"/>
-          </a:effectRef>
-          <a:fontRef idx="minor">
-            <a:schemeClr val="lt1"/>
-          </a:fontRef>
-        </p:style>
-        <p:txBody>
-          <a:bodyPr lIns="127000" tIns="63500" rIns="127000" bIns="63500" rtlCol="0" anchor="ctr"/>
-          <a:lstStyle/>
-          <a:p>
-            <a:pPr algn="ctr"/>
-            <a:r>
-              <a:rPr lang="en-GB" b="1">
-                <a:solidFill>
-                  <a:srgbClr val="FFFFFF"/>
-                </a:solidFill>
-                <a:latin typeface="Aptos" panose="020B0004020202020204" pitchFamily="34" charset="0"/>
-              </a:rPr>
-              <a:t>Quest tracking must remain usable throughout the sequence</a:t>
-            </a:r>
-          </a:p>
-        </p:txBody>
-      </p:sp>
-      <p:sp>
-        <p:nvSpPr>
-          <p:cNvPr id="28" name="TextBox 27">
-            <a:extLst>
-              <a:ext uri="{FF2B5EF4-FFF2-40B4-BE49-F238E27FC236}">
-                <a16:creationId xmlns:a16="http://schemas.microsoft.com/office/drawing/2014/main" id="{37920B1F-B28E-741D-4C5F-FD7A0CE9048C}"/>
-              </a:ext>
-            </a:extLst>
-          </p:cNvPr>
-          <p:cNvSpPr txBox="1"/>
-          <p:nvPr/>
-        </p:nvSpPr>
-        <p:spPr>
-          <a:xfrm>
-            <a:off x="825500" y="5918200"/>
-            <a:ext cx="10541000" cy="461665"/>
-          </a:xfrm>
-          <a:prstGeom prst="rect">
-            <a:avLst/>
-          </a:prstGeom>
-          <a:noFill/>
-        </p:spPr>
-        <p:txBody>
-          <a:bodyPr vert="horz" lIns="0" tIns="0" rIns="0" bIns="0" rtlCol="0" anchor="t">
-            <a:spAutoFit/>
-          </a:bodyPr>
-          <a:lstStyle/>
-          <a:p>
-            <a:pPr algn="ctr"/>
-            <a:r>
-              <a:rPr lang="en-GB" sz="1500" b="1">
-                <a:solidFill>
-                  <a:srgbClr val="16324F"/>
-                </a:solidFill>
-                <a:latin typeface="Aptos" panose="020B0004020202020204" pitchFamily="34" charset="0"/>
-              </a:rPr>
-              <a:t>Acceptance: no random fly-in • correct orientation • acceptable wobble • loss recovery • real mannequin movement retained</a:t>
-            </a:r>
-          </a:p>
-        </p:txBody>
-      </p:sp>
-      <p:sp>
-        <p:nvSpPr>
-          <p:cNvPr id="29" name="TextBox 28">
-            <a:extLst>
-              <a:ext uri="{FF2B5EF4-FFF2-40B4-BE49-F238E27FC236}">
-                <a16:creationId xmlns:a16="http://schemas.microsoft.com/office/drawing/2014/main" id="{0BA8AB7F-C57E-4A38-3F06-43813EEED092}"/>
-              </a:ext>
-            </a:extLst>
-          </p:cNvPr>
-          <p:cNvSpPr txBox="1"/>
-          <p:nvPr/>
-        </p:nvSpPr>
-        <p:spPr>
-          <a:xfrm>
-            <a:off x="533400" y="6489700"/>
-            <a:ext cx="9779000" cy="123111"/>
-          </a:xfrm>
-          <a:prstGeom prst="rect">
-            <a:avLst/>
-          </a:prstGeom>
-          <a:noFill/>
-        </p:spPr>
-        <p:txBody>
-          <a:bodyPr vert="horz" lIns="0" tIns="0" rIns="0" bIns="0" rtlCol="0" anchor="t">
-            <a:spAutoFit/>
-          </a:bodyPr>
-          <a:lstStyle/>
-          <a:p>
-            <a:r>
-              <a:rPr lang="en-GB" sz="800">
-                <a:solidFill>
-                  <a:srgbClr val="5C7084"/>
-                </a:solidFill>
-                <a:latin typeface="Aptos" panose="020B0004020202020204" pitchFamily="34" charset="0"/>
-              </a:rPr>
-              <a:t>Scenario 1 // Lernplattform • medical content must be approved by the project medical partners</a:t>
-            </a:r>
-          </a:p>
-        </p:txBody>
-      </p:sp>
-      <p:sp>
-        <p:nvSpPr>
-          <p:cNvPr id="30" name="TextBox 29">
-            <a:extLst>
-              <a:ext uri="{FF2B5EF4-FFF2-40B4-BE49-F238E27FC236}">
-                <a16:creationId xmlns:a16="http://schemas.microsoft.com/office/drawing/2014/main" id="{B5D7431F-DAED-BB22-5EBE-BC76834C4873}"/>
-              </a:ext>
-            </a:extLst>
-          </p:cNvPr>
-          <p:cNvSpPr txBox="1"/>
-          <p:nvPr/>
-        </p:nvSpPr>
-        <p:spPr>
-          <a:xfrm>
-            <a:off x="11074400" y="6438900"/>
-            <a:ext cx="584200" cy="138499"/>
-          </a:xfrm>
-          <a:prstGeom prst="rect">
-            <a:avLst/>
-          </a:prstGeom>
-          <a:noFill/>
-        </p:spPr>
-        <p:txBody>
-          <a:bodyPr vert="horz" lIns="0" tIns="0" rIns="0" bIns="0" rtlCol="0" anchor="t">
-            <a:spAutoFit/>
-          </a:bodyPr>
-          <a:lstStyle/>
-          <a:p>
-            <a:pPr algn="r"/>
-            <a:r>
-              <a:rPr lang="en-GB" sz="900" b="1">
-                <a:solidFill>
-                  <a:srgbClr val="5C7084"/>
-                </a:solidFill>
-                <a:latin typeface="Aptos" panose="020B0004020202020204" pitchFamily="34" charset="0"/>
-              </a:rPr>
-              <a:t>16</a:t>
-            </a:r>
-          </a:p>
-        </p:txBody>
-      </p:sp>
-    </p:spTree>
-    <p:extLst>
-      <p:ext uri="{BB962C8B-B14F-4D97-AF65-F5344CB8AC3E}">
-        <p14:creationId xmlns:p14="http://schemas.microsoft.com/office/powerpoint/2010/main" val="2577031642"/>
-      </p:ext>
-    </p:extLst>
-  </p:cSld>
-  <p:clrMapOvr>
-    <a:masterClrMapping/>
-  </p:clrMapOvr>
-</p:sld>
-</file>
-
-<file path=ppt/slides/slide16.xml><?xml version="1.0" encoding="utf-8"?>
-<p:sld xmlns:a="http://schemas.openxmlformats.org/drawingml/2006/main" xmlns:r="http://schemas.openxmlformats.org/officeDocument/2006/relationships" xmlns:p="http://schemas.openxmlformats.org/presentationml/2006/main">
-  <p:cSld>
-    <p:bg>
-      <p:bgPr>
-        <a:solidFill>
-          <a:srgbClr val="F5F8FC"/>
-        </a:solidFill>
-        <a:effectLst/>
-      </p:bgPr>
-    </p:bg>
-    <p:spTree>
-      <p:nvGrpSpPr>
-        <p:cNvPr id="1" name=""/>
-        <p:cNvGrpSpPr/>
-        <p:nvPr/>
-      </p:nvGrpSpPr>
-      <p:grpSpPr>
-        <a:xfrm>
-          <a:off x="0" y="0"/>
-          <a:ext cx="0" cy="0"/>
-          <a:chOff x="0" y="0"/>
-          <a:chExt cx="0" cy="0"/>
-        </a:xfrm>
-      </p:grpSpPr>
-      <p:sp>
-        <p:nvSpPr>
-          <p:cNvPr id="2" name="TextBox 1">
-            <a:extLst>
-              <a:ext uri="{FF2B5EF4-FFF2-40B4-BE49-F238E27FC236}">
-                <a16:creationId xmlns:a16="http://schemas.microsoft.com/office/drawing/2014/main" id="{13553AF2-3462-DB9F-CEA4-43C4628C75D6}"/>
-              </a:ext>
-            </a:extLst>
-          </p:cNvPr>
-          <p:cNvSpPr txBox="1"/>
-          <p:nvPr/>
-        </p:nvSpPr>
-        <p:spPr>
-          <a:xfrm>
-            <a:off x="533400" y="279400"/>
-            <a:ext cx="7620000" cy="153888"/>
-          </a:xfrm>
-          <a:prstGeom prst="rect">
-            <a:avLst/>
-          </a:prstGeom>
-          <a:noFill/>
-        </p:spPr>
-        <p:txBody>
-          <a:bodyPr vert="horz" lIns="0" tIns="0" rIns="0" bIns="0" rtlCol="0" anchor="t">
-            <a:spAutoFit/>
-          </a:bodyPr>
-          <a:lstStyle/>
-          <a:p>
-            <a:r>
-              <a:rPr lang="en-GB" sz="1000" b="1">
-                <a:solidFill>
-                  <a:srgbClr val="1976D2"/>
-                </a:solidFill>
-                <a:latin typeface="Aptos" panose="020B0004020202020204" pitchFamily="34" charset="0"/>
-              </a:rPr>
-              <a:t>CURRENT QUEST RUNTIME</a:t>
-            </a:r>
-          </a:p>
-        </p:txBody>
-      </p:sp>
-      <p:sp>
-        <p:nvSpPr>
-          <p:cNvPr id="3" name="TextBox 2">
-            <a:extLst>
-              <a:ext uri="{FF2B5EF4-FFF2-40B4-BE49-F238E27FC236}">
-                <a16:creationId xmlns:a16="http://schemas.microsoft.com/office/drawing/2014/main" id="{23187BFA-A035-3541-37B7-6EC2C595C02A}"/>
-              </a:ext>
-            </a:extLst>
-          </p:cNvPr>
-          <p:cNvSpPr txBox="1"/>
-          <p:nvPr/>
-        </p:nvSpPr>
-        <p:spPr>
-          <a:xfrm>
-            <a:off x="533400" y="609600"/>
-            <a:ext cx="10985500" cy="430887"/>
-          </a:xfrm>
-          <a:prstGeom prst="rect">
-            <a:avLst/>
-          </a:prstGeom>
-          <a:noFill/>
-        </p:spPr>
-        <p:txBody>
-          <a:bodyPr vert="horz" lIns="0" tIns="0" rIns="0" bIns="0" rtlCol="0" anchor="t">
-            <a:spAutoFit/>
-          </a:bodyPr>
-          <a:lstStyle/>
-          <a:p>
-            <a:r>
-              <a:rPr lang="en-GB" sz="2800" b="1">
-                <a:solidFill>
-                  <a:srgbClr val="102A43"/>
-                </a:solidFill>
-                <a:latin typeface="Aptos" panose="020B0004020202020204" pitchFamily="34" charset="0"/>
-              </a:rPr>
-              <a:t>From technical prototype to NaReT deliverable</a:t>
-            </a:r>
-          </a:p>
-        </p:txBody>
-      </p:sp>
-      <p:sp>
-        <p:nvSpPr>
-          <p:cNvPr id="4" name="Rectangle 3">
-            <a:extLst>
-              <a:ext uri="{FF2B5EF4-FFF2-40B4-BE49-F238E27FC236}">
-                <a16:creationId xmlns:a16="http://schemas.microsoft.com/office/drawing/2014/main" id="{56A76EC4-88FC-DE6A-8898-FD0D5232FF79}"/>
-              </a:ext>
-            </a:extLst>
-          </p:cNvPr>
-          <p:cNvSpPr/>
-          <p:nvPr/>
-        </p:nvSpPr>
-        <p:spPr>
-          <a:xfrm>
-            <a:off x="533400" y="1282700"/>
-            <a:ext cx="11125200" cy="38100"/>
-          </a:xfrm>
-          <a:prstGeom prst="rect">
-            <a:avLst/>
-          </a:prstGeom>
-          <a:solidFill>
-            <a:srgbClr val="2CB1BC"/>
-          </a:solidFill>
-          <a:ln w="19050" cap="flat" cmpd="sng" algn="ctr">
-            <a:noFill/>
-            <a:prstDash val="solid"/>
-            <a:miter lim="800000"/>
-          </a:ln>
-          <a:effectLst/>
-          <a:extLst>
-            <a:ext uri="{91240B29-F687-4F45-9708-019B960494DF}">
-              <a14:hiddenLine xmlns:a14="http://schemas.microsoft.com/office/drawing/2010/main" w="19050" cap="flat" cmpd="sng" algn="ctr">
-                <a:solidFill>
-                  <a:schemeClr val="accent1">
-                    <a:shade val="15000"/>
-                  </a:schemeClr>
-                </a:solidFill>
-                <a:prstDash val="solid"/>
-                <a:miter lim="800000"/>
-              </a14:hiddenLine>
-            </a:ext>
-          </a:extLst>
-        </p:spPr>
-        <p:style>
-          <a:lnRef idx="2">
-            <a:schemeClr val="accent1">
-              <a:shade val="15000"/>
-            </a:schemeClr>
-          </a:lnRef>
-          <a:fillRef idx="1">
-            <a:schemeClr val="accent1"/>
-          </a:fillRef>
-          <a:effectRef idx="0">
-            <a:schemeClr val="accent1"/>
-          </a:effectRef>
-          <a:fontRef idx="minor">
-            <a:schemeClr val="lt1"/>
-          </a:fontRef>
-        </p:style>
-        <p:txBody>
-          <a:bodyPr rtlCol="0" anchor="ctr"/>
-          <a:lstStyle/>
-          <a:p>
-            <a:pPr algn="ctr"/>
-            <a:endParaRPr lang="en-GB"/>
-          </a:p>
-        </p:txBody>
-      </p:sp>
-      <p:sp>
-        <p:nvSpPr>
-          <p:cNvPr id="5" name="Rectangle: Rounded Corners 4">
-            <a:extLst>
-              <a:ext uri="{FF2B5EF4-FFF2-40B4-BE49-F238E27FC236}">
-                <a16:creationId xmlns:a16="http://schemas.microsoft.com/office/drawing/2014/main" id="{67F4FB24-6F32-AE1E-A1A1-799AC2DBF0A0}"/>
-              </a:ext>
-            </a:extLst>
-          </p:cNvPr>
-          <p:cNvSpPr/>
-          <p:nvPr/>
-        </p:nvSpPr>
-        <p:spPr>
-          <a:xfrm>
-            <a:off x="635000" y="1828800"/>
-            <a:ext cx="3365500" cy="609600"/>
-          </a:xfrm>
-          <a:prstGeom prst="roundRect">
-            <a:avLst/>
-          </a:prstGeom>
-          <a:solidFill>
-            <a:srgbClr val="1976D2"/>
-          </a:solidFill>
-          <a:ln w="15875">
-            <a:solidFill>
-              <a:srgbClr val="1976D2"/>
-            </a:solidFill>
-          </a:ln>
-        </p:spPr>
-        <p:style>
-          <a:lnRef idx="2">
-            <a:schemeClr val="accent1">
-              <a:shade val="15000"/>
-            </a:schemeClr>
-          </a:lnRef>
-          <a:fillRef idx="1">
-            <a:schemeClr val="accent1"/>
-          </a:fillRef>
-          <a:effectRef idx="0">
-            <a:schemeClr val="accent1"/>
-          </a:effectRef>
-          <a:fontRef idx="minor">
-            <a:schemeClr val="lt1"/>
-          </a:fontRef>
-        </p:style>
-        <p:txBody>
-          <a:bodyPr lIns="127000" tIns="63500" rIns="127000" bIns="63500" rtlCol="0" anchor="ctr"/>
-          <a:lstStyle/>
-          <a:p>
-            <a:pPr algn="ctr"/>
-            <a:r>
-              <a:rPr lang="en-GB" sz="1700" b="1">
-                <a:solidFill>
-                  <a:srgbClr val="FFFFFF"/>
-                </a:solidFill>
-                <a:latin typeface="Aptos" panose="020B0004020202020204" pitchFamily="34" charset="0"/>
-              </a:rPr>
-              <a:t>CONTENT</a:t>
-            </a:r>
-          </a:p>
-        </p:txBody>
-      </p:sp>
-      <p:sp>
-        <p:nvSpPr>
-          <p:cNvPr id="6" name="Rectangle: Rounded Corners 5">
-            <a:extLst>
-              <a:ext uri="{FF2B5EF4-FFF2-40B4-BE49-F238E27FC236}">
-                <a16:creationId xmlns:a16="http://schemas.microsoft.com/office/drawing/2014/main" id="{D0B5BE4A-8FF1-DA0A-6F39-839DA7FD2A60}"/>
-              </a:ext>
-            </a:extLst>
-          </p:cNvPr>
-          <p:cNvSpPr/>
-          <p:nvPr/>
-        </p:nvSpPr>
-        <p:spPr>
-          <a:xfrm>
-            <a:off x="635000" y="2590800"/>
-            <a:ext cx="3365500" cy="2349500"/>
-          </a:xfrm>
-          <a:prstGeom prst="roundRect">
-            <a:avLst/>
-          </a:prstGeom>
-          <a:solidFill>
-            <a:srgbClr val="FFFFFF"/>
-          </a:solidFill>
-          <a:ln w="15875">
-            <a:solidFill>
-              <a:srgbClr val="C8D6E2"/>
-            </a:solidFill>
-          </a:ln>
-        </p:spPr>
-        <p:style>
-          <a:lnRef idx="2">
-            <a:schemeClr val="accent1">
-              <a:shade val="15000"/>
-            </a:schemeClr>
-          </a:lnRef>
-          <a:fillRef idx="1">
-            <a:schemeClr val="accent1"/>
-          </a:fillRef>
-          <a:effectRef idx="0">
-            <a:schemeClr val="accent1"/>
-          </a:effectRef>
-          <a:fontRef idx="minor">
-            <a:schemeClr val="lt1"/>
-          </a:fontRef>
-        </p:style>
-        <p:txBody>
-          <a:bodyPr lIns="127000" tIns="63500" rIns="127000" bIns="63500" rtlCol="0" anchor="ctr"/>
-          <a:lstStyle/>
-          <a:p>
-            <a:pPr algn="ctr"/>
-            <a:r>
-              <a:rPr lang="en-GB" sz="1500">
-                <a:solidFill>
-                  <a:srgbClr val="16324F"/>
-                </a:solidFill>
-                <a:latin typeface="Aptos" panose="020B0004020202020204" pitchFamily="34" charset="0"/>
-              </a:rPr>
-              <a:t>German + Polish</a:t>
-            </a:r>
-            <a:br>
-              <a:rPr lang="en-GB" sz="1500">
-                <a:solidFill>
-                  <a:srgbClr val="16324F"/>
-                </a:solidFill>
-                <a:latin typeface="Aptos" panose="020B0004020202020204" pitchFamily="34" charset="0"/>
-              </a:rPr>
-            </a:br>
-            <a:r>
-              <a:rPr lang="en-GB" sz="1500">
-                <a:solidFill>
-                  <a:srgbClr val="16324F"/>
-                </a:solidFill>
-                <a:latin typeface="Aptos" panose="020B0004020202020204" pitchFamily="34" charset="0"/>
-              </a:rPr>
-              <a:t>Productive vs receptive phrases</a:t>
-            </a:r>
-            <a:br>
-              <a:rPr lang="en-GB" sz="1500">
-                <a:solidFill>
-                  <a:srgbClr val="16324F"/>
-                </a:solidFill>
-                <a:latin typeface="Aptos" panose="020B0004020202020204" pitchFamily="34" charset="0"/>
-              </a:rPr>
-            </a:br>
-            <a:r>
-              <a:rPr lang="en-GB" sz="1500">
-                <a:solidFill>
-                  <a:srgbClr val="16324F"/>
-                </a:solidFill>
-                <a:latin typeface="Aptos" panose="020B0004020202020204" pitchFamily="34" charset="0"/>
-              </a:rPr>
-              <a:t>Audio + pronunciation</a:t>
-            </a:r>
-            <a:br>
-              <a:rPr lang="en-GB" sz="1500">
-                <a:solidFill>
-                  <a:srgbClr val="16324F"/>
-                </a:solidFill>
-                <a:latin typeface="Aptos" panose="020B0004020202020204" pitchFamily="34" charset="0"/>
-              </a:rPr>
-            </a:br>
-            <a:r>
-              <a:rPr lang="en-GB" sz="1500">
-                <a:solidFill>
-                  <a:srgbClr val="16324F"/>
-                </a:solidFill>
-                <a:latin typeface="Aptos" panose="020B0004020202020204" pitchFamily="34" charset="0"/>
-              </a:rPr>
-              <a:t>AED and Situation B</a:t>
-            </a:r>
-          </a:p>
-        </p:txBody>
-      </p:sp>
-      <p:sp>
-        <p:nvSpPr>
-          <p:cNvPr id="7" name="Rectangle: Rounded Corners 6">
-            <a:extLst>
-              <a:ext uri="{FF2B5EF4-FFF2-40B4-BE49-F238E27FC236}">
-                <a16:creationId xmlns:a16="http://schemas.microsoft.com/office/drawing/2014/main" id="{1432C68D-2B31-336F-DD43-28B56F6E2A6F}"/>
-              </a:ext>
-            </a:extLst>
-          </p:cNvPr>
-          <p:cNvSpPr/>
-          <p:nvPr/>
-        </p:nvSpPr>
-        <p:spPr>
-          <a:xfrm>
-            <a:off x="4483100" y="1828800"/>
-            <a:ext cx="3365500" cy="609600"/>
-          </a:xfrm>
-          <a:prstGeom prst="roundRect">
-            <a:avLst/>
-          </a:prstGeom>
-          <a:solidFill>
-            <a:srgbClr val="7152AD"/>
-          </a:solidFill>
-          <a:ln w="15875">
-            <a:solidFill>
-              <a:srgbClr val="7152AD"/>
-            </a:solidFill>
-          </a:ln>
-        </p:spPr>
-        <p:style>
-          <a:lnRef idx="2">
-            <a:schemeClr val="accent1">
-              <a:shade val="15000"/>
-            </a:schemeClr>
-          </a:lnRef>
-          <a:fillRef idx="1">
-            <a:schemeClr val="accent1"/>
-          </a:fillRef>
-          <a:effectRef idx="0">
-            <a:schemeClr val="accent1"/>
-          </a:effectRef>
-          <a:fontRef idx="minor">
-            <a:schemeClr val="lt1"/>
-          </a:fontRef>
-        </p:style>
-        <p:txBody>
-          <a:bodyPr lIns="127000" tIns="63500" rIns="127000" bIns="63500" rtlCol="0" anchor="ctr"/>
-          <a:lstStyle/>
-          <a:p>
-            <a:pPr algn="ctr"/>
-            <a:r>
-              <a:rPr lang="en-GB" sz="1700" b="1">
-                <a:solidFill>
-                  <a:srgbClr val="FFFFFF"/>
-                </a:solidFill>
-                <a:latin typeface="Aptos" panose="020B0004020202020204" pitchFamily="34" charset="0"/>
-              </a:rPr>
-              <a:t>QUALITY</a:t>
-            </a:r>
-          </a:p>
-        </p:txBody>
-      </p:sp>
-      <p:sp>
-        <p:nvSpPr>
-          <p:cNvPr id="8" name="Rectangle: Rounded Corners 7">
-            <a:extLst>
-              <a:ext uri="{FF2B5EF4-FFF2-40B4-BE49-F238E27FC236}">
-                <a16:creationId xmlns:a16="http://schemas.microsoft.com/office/drawing/2014/main" id="{B297795C-4200-4ACC-FF21-D7DB3CB2182B}"/>
-              </a:ext>
-            </a:extLst>
-          </p:cNvPr>
-          <p:cNvSpPr/>
-          <p:nvPr/>
-        </p:nvSpPr>
-        <p:spPr>
-          <a:xfrm>
-            <a:off x="4483100" y="2590800"/>
-            <a:ext cx="3365500" cy="2349500"/>
-          </a:xfrm>
-          <a:prstGeom prst="roundRect">
-            <a:avLst/>
-          </a:prstGeom>
-          <a:solidFill>
-            <a:srgbClr val="FFFFFF"/>
-          </a:solidFill>
-          <a:ln w="15875">
-            <a:solidFill>
-              <a:srgbClr val="C8D6E2"/>
-            </a:solidFill>
-          </a:ln>
-        </p:spPr>
-        <p:style>
-          <a:lnRef idx="2">
-            <a:schemeClr val="accent1">
-              <a:shade val="15000"/>
-            </a:schemeClr>
-          </a:lnRef>
-          <a:fillRef idx="1">
-            <a:schemeClr val="accent1"/>
-          </a:fillRef>
-          <a:effectRef idx="0">
-            <a:schemeClr val="accent1"/>
-          </a:effectRef>
-          <a:fontRef idx="minor">
-            <a:schemeClr val="lt1"/>
-          </a:fontRef>
-        </p:style>
-        <p:txBody>
-          <a:bodyPr lIns="127000" tIns="63500" rIns="127000" bIns="63500" rtlCol="0" anchor="ctr"/>
-          <a:lstStyle/>
-          <a:p>
-            <a:pPr algn="ctr"/>
-            <a:r>
-              <a:rPr lang="en-GB" sz="1500">
-                <a:solidFill>
-                  <a:srgbClr val="16324F"/>
-                </a:solidFill>
-                <a:latin typeface="Aptos" panose="020B0004020202020204" pitchFamily="34" charset="0"/>
-              </a:rPr>
-              <a:t>Usability + accessibility</a:t>
-            </a:r>
-            <a:br>
-              <a:rPr lang="en-GB" sz="1500">
-                <a:solidFill>
-                  <a:srgbClr val="16324F"/>
-                </a:solidFill>
-                <a:latin typeface="Aptos" panose="020B0004020202020204" pitchFamily="34" charset="0"/>
-              </a:rPr>
-            </a:br>
-            <a:r>
-              <a:rPr lang="en-GB" sz="1500">
-                <a:solidFill>
-                  <a:srgbClr val="16324F"/>
-                </a:solidFill>
-                <a:latin typeface="Aptos" panose="020B0004020202020204" pitchFamily="34" charset="0"/>
-              </a:rPr>
-              <a:t>Phone/tablet/desktop</a:t>
-            </a:r>
-            <a:br>
-              <a:rPr lang="en-GB" sz="1500">
-                <a:solidFill>
-                  <a:srgbClr val="16324F"/>
-                </a:solidFill>
-                <a:latin typeface="Aptos" panose="020B0004020202020204" pitchFamily="34" charset="0"/>
-              </a:rPr>
-            </a:br>
-            <a:r>
-              <a:rPr lang="en-GB" sz="1500">
-                <a:solidFill>
-                  <a:srgbClr val="16324F"/>
-                </a:solidFill>
-                <a:latin typeface="Aptos" panose="020B0004020202020204" pitchFamily="34" charset="0"/>
-              </a:rPr>
-              <a:t>Privacy decisions</a:t>
-            </a:r>
-            <a:br>
-              <a:rPr lang="en-GB" sz="1500">
-                <a:solidFill>
-                  <a:srgbClr val="16324F"/>
-                </a:solidFill>
-                <a:latin typeface="Aptos" panose="020B0004020202020204" pitchFamily="34" charset="0"/>
-              </a:rPr>
-            </a:br>
-            <a:r>
-              <a:rPr lang="en-GB" sz="1500">
-                <a:solidFill>
-                  <a:srgbClr val="16324F"/>
-                </a:solidFill>
-                <a:latin typeface="Aptos" panose="020B0004020202020204" pitchFamily="34" charset="0"/>
-              </a:rPr>
-              <a:t>Reliable Quest tracking</a:t>
-            </a:r>
-          </a:p>
-        </p:txBody>
-      </p:sp>
-      <p:sp>
-        <p:nvSpPr>
-          <p:cNvPr id="9" name="Rectangle: Rounded Corners 8">
-            <a:extLst>
-              <a:ext uri="{FF2B5EF4-FFF2-40B4-BE49-F238E27FC236}">
-                <a16:creationId xmlns:a16="http://schemas.microsoft.com/office/drawing/2014/main" id="{70F0A0FB-9A28-9FFB-D186-33635EB3B040}"/>
-              </a:ext>
-            </a:extLst>
-          </p:cNvPr>
-          <p:cNvSpPr/>
-          <p:nvPr/>
-        </p:nvSpPr>
-        <p:spPr>
-          <a:xfrm>
-            <a:off x="8331200" y="1828800"/>
-            <a:ext cx="3365500" cy="609600"/>
-          </a:xfrm>
-          <a:prstGeom prst="roundRect">
-            <a:avLst/>
-          </a:prstGeom>
-          <a:solidFill>
-            <a:srgbClr val="27AE60"/>
-          </a:solidFill>
-          <a:ln w="15875">
-            <a:solidFill>
-              <a:srgbClr val="27AE60"/>
-            </a:solidFill>
-          </a:ln>
-        </p:spPr>
-        <p:style>
-          <a:lnRef idx="2">
-            <a:schemeClr val="accent1">
-              <a:shade val="15000"/>
-            </a:schemeClr>
-          </a:lnRef>
-          <a:fillRef idx="1">
-            <a:schemeClr val="accent1"/>
-          </a:fillRef>
-          <a:effectRef idx="0">
-            <a:schemeClr val="accent1"/>
-          </a:effectRef>
-          <a:fontRef idx="minor">
-            <a:schemeClr val="lt1"/>
-          </a:fontRef>
-        </p:style>
-        <p:txBody>
-          <a:bodyPr lIns="127000" tIns="63500" rIns="127000" bIns="63500" rtlCol="0" anchor="ctr"/>
-          <a:lstStyle/>
-          <a:p>
-            <a:pPr algn="ctr"/>
-            <a:r>
-              <a:rPr lang="en-GB" sz="1700" b="1">
-                <a:solidFill>
-                  <a:srgbClr val="FFFFFF"/>
-                </a:solidFill>
-                <a:latin typeface="Aptos" panose="020B0004020202020204" pitchFamily="34" charset="0"/>
-              </a:rPr>
-              <a:t>EVIDENCE</a:t>
-            </a:r>
-          </a:p>
-        </p:txBody>
-      </p:sp>
-      <p:sp>
-        <p:nvSpPr>
-          <p:cNvPr id="10" name="Rectangle: Rounded Corners 9">
-            <a:extLst>
-              <a:ext uri="{FF2B5EF4-FFF2-40B4-BE49-F238E27FC236}">
-                <a16:creationId xmlns:a16="http://schemas.microsoft.com/office/drawing/2014/main" id="{4B6B770D-62E2-D5DB-BCBF-D7E01C674B62}"/>
-              </a:ext>
-            </a:extLst>
-          </p:cNvPr>
-          <p:cNvSpPr/>
-          <p:nvPr/>
-        </p:nvSpPr>
-        <p:spPr>
-          <a:xfrm>
-            <a:off x="8331200" y="2590800"/>
-            <a:ext cx="3365500" cy="2349500"/>
-          </a:xfrm>
-          <a:prstGeom prst="roundRect">
-            <a:avLst/>
-          </a:prstGeom>
-          <a:solidFill>
-            <a:srgbClr val="FFFFFF"/>
-          </a:solidFill>
-          <a:ln w="15875">
-            <a:solidFill>
-              <a:srgbClr val="C8D6E2"/>
-            </a:solidFill>
-          </a:ln>
-        </p:spPr>
-        <p:style>
-          <a:lnRef idx="2">
-            <a:schemeClr val="accent1">
-              <a:shade val="15000"/>
-            </a:schemeClr>
-          </a:lnRef>
-          <a:fillRef idx="1">
-            <a:schemeClr val="accent1"/>
-          </a:fillRef>
-          <a:effectRef idx="0">
-            <a:schemeClr val="accent1"/>
-          </a:effectRef>
-          <a:fontRef idx="minor">
-            <a:schemeClr val="lt1"/>
-          </a:fontRef>
-        </p:style>
-        <p:txBody>
-          <a:bodyPr lIns="127000" tIns="63500" rIns="127000" bIns="63500" rtlCol="0" anchor="ctr"/>
-          <a:lstStyle/>
-          <a:p>
-            <a:pPr algn="ctr"/>
-            <a:r>
-              <a:rPr lang="fr-FR" sz="1500">
-                <a:solidFill>
-                  <a:srgbClr val="16324F"/>
-                </a:solidFill>
-                <a:latin typeface="Aptos" panose="020B0004020202020204" pitchFamily="34" charset="0"/>
-              </a:rPr>
-              <a:t>Structured user tests</a:t>
-            </a:r>
-            <a:br>
-              <a:rPr lang="fr-FR" sz="1500">
-                <a:solidFill>
-                  <a:srgbClr val="16324F"/>
-                </a:solidFill>
-                <a:latin typeface="Aptos" panose="020B0004020202020204" pitchFamily="34" charset="0"/>
-              </a:rPr>
-            </a:br>
-            <a:r>
-              <a:rPr lang="fr-FR" sz="1500">
-                <a:solidFill>
-                  <a:srgbClr val="16324F"/>
-                </a:solidFill>
-                <a:latin typeface="Aptos" panose="020B0004020202020204" pitchFamily="34" charset="0"/>
-              </a:rPr>
-              <a:t>Quantitative + qualitative evaluation</a:t>
-            </a:r>
-            <a:br>
-              <a:rPr lang="fr-FR" sz="1500">
-                <a:solidFill>
-                  <a:srgbClr val="16324F"/>
-                </a:solidFill>
-                <a:latin typeface="Aptos" panose="020B0004020202020204" pitchFamily="34" charset="0"/>
-              </a:rPr>
-            </a:br>
-            <a:r>
-              <a:rPr lang="fr-FR" sz="1500">
-                <a:solidFill>
-                  <a:srgbClr val="16324F"/>
-                </a:solidFill>
-                <a:latin typeface="Aptos" panose="020B0004020202020204" pitchFamily="34" charset="0"/>
-              </a:rPr>
-              <a:t>Iterative corrections</a:t>
-            </a:r>
-            <a:br>
-              <a:rPr lang="fr-FR" sz="1500">
-                <a:solidFill>
-                  <a:srgbClr val="16324F"/>
-                </a:solidFill>
-                <a:latin typeface="Aptos" panose="020B0004020202020204" pitchFamily="34" charset="0"/>
-              </a:rPr>
-            </a:br>
-            <a:r>
-              <a:rPr lang="fr-FR" sz="1500">
-                <a:solidFill>
-                  <a:srgbClr val="16324F"/>
-                </a:solidFill>
-                <a:latin typeface="Aptos" panose="020B0004020202020204" pitchFamily="34" charset="0"/>
-              </a:rPr>
-              <a:t>Project documentation</a:t>
-            </a:r>
-            <a:endParaRPr lang="en-GB" sz="1500">
-              <a:solidFill>
-                <a:srgbClr val="16324F"/>
-              </a:solidFill>
-              <a:latin typeface="Aptos" panose="020B0004020202020204" pitchFamily="34" charset="0"/>
-            </a:endParaRPr>
-          </a:p>
-        </p:txBody>
-      </p:sp>
-      <p:sp>
-        <p:nvSpPr>
-          <p:cNvPr id="11" name="Rectangle: Rounded Corners 10">
-            <a:extLst>
-              <a:ext uri="{FF2B5EF4-FFF2-40B4-BE49-F238E27FC236}">
-                <a16:creationId xmlns:a16="http://schemas.microsoft.com/office/drawing/2014/main" id="{3A1890C8-7390-0E73-A14F-44C9523CB236}"/>
-              </a:ext>
-            </a:extLst>
-          </p:cNvPr>
-          <p:cNvSpPr/>
-          <p:nvPr/>
-        </p:nvSpPr>
-        <p:spPr>
-          <a:xfrm>
-            <a:off x="952500" y="5486400"/>
-            <a:ext cx="10287000" cy="762000"/>
-          </a:xfrm>
-          <a:prstGeom prst="roundRect">
-            <a:avLst/>
-          </a:prstGeom>
-          <a:solidFill>
-            <a:srgbClr val="2CB1BC"/>
-          </a:solidFill>
-          <a:ln w="15875">
-            <a:solidFill>
-              <a:srgbClr val="2CB1BC"/>
-            </a:solidFill>
-          </a:ln>
-        </p:spPr>
-        <p:style>
-          <a:lnRef idx="2">
-            <a:schemeClr val="accent1">
-              <a:shade val="15000"/>
-            </a:schemeClr>
-          </a:lnRef>
-          <a:fillRef idx="1">
-            <a:schemeClr val="accent1"/>
-          </a:fillRef>
-          <a:effectRef idx="0">
-            <a:schemeClr val="accent1"/>
-          </a:effectRef>
-          <a:fontRef idx="minor">
-            <a:schemeClr val="lt1"/>
-          </a:fontRef>
-        </p:style>
-        <p:txBody>
-          <a:bodyPr lIns="127000" tIns="63500" rIns="127000" bIns="63500" rtlCol="0" anchor="ctr"/>
-          <a:lstStyle/>
-          <a:p>
-            <a:pPr algn="ctr"/>
-            <a:r>
-              <a:rPr lang="en-GB" sz="1500" b="1">
-                <a:solidFill>
-                  <a:srgbClr val="FFFFFF"/>
-                </a:solidFill>
-                <a:latin typeface="Aptos" panose="020B0004020202020204" pitchFamily="34" charset="0"/>
-              </a:rPr>
-              <a:t>Current Drive priorities: platform skeleton • language minigames • privacy • audio/speech • AED scope • Situation B • responsive UI • documentation</a:t>
-            </a:r>
-          </a:p>
-        </p:txBody>
-      </p:sp>
-      <p:sp>
-        <p:nvSpPr>
-          <p:cNvPr id="12" name="TextBox 11">
-            <a:extLst>
-              <a:ext uri="{FF2B5EF4-FFF2-40B4-BE49-F238E27FC236}">
-                <a16:creationId xmlns:a16="http://schemas.microsoft.com/office/drawing/2014/main" id="{38ECF1FE-183F-06A1-B534-FB45D3359F1E}"/>
-              </a:ext>
-            </a:extLst>
-          </p:cNvPr>
-          <p:cNvSpPr txBox="1"/>
-          <p:nvPr/>
-        </p:nvSpPr>
-        <p:spPr>
-          <a:xfrm>
-            <a:off x="533400" y="6489700"/>
-            <a:ext cx="9779000" cy="123111"/>
-          </a:xfrm>
-          <a:prstGeom prst="rect">
-            <a:avLst/>
-          </a:prstGeom>
-          <a:noFill/>
-        </p:spPr>
-        <p:txBody>
-          <a:bodyPr vert="horz" lIns="0" tIns="0" rIns="0" bIns="0" rtlCol="0" anchor="t">
-            <a:spAutoFit/>
-          </a:bodyPr>
-          <a:lstStyle/>
-          <a:p>
-            <a:r>
-              <a:rPr lang="en-GB" sz="800">
-                <a:solidFill>
-                  <a:srgbClr val="5C7084"/>
-                </a:solidFill>
-                <a:latin typeface="Aptos" panose="020B0004020202020204" pitchFamily="34" charset="0"/>
-              </a:rPr>
-              <a:t>Source: NaReT Action Items board (read-only GitHub export) • JEMS A1.5 and A1.7</a:t>
-            </a:r>
-          </a:p>
-        </p:txBody>
-      </p:sp>
-      <p:sp>
-        <p:nvSpPr>
-          <p:cNvPr id="13" name="TextBox 12">
-            <a:extLst>
-              <a:ext uri="{FF2B5EF4-FFF2-40B4-BE49-F238E27FC236}">
-                <a16:creationId xmlns:a16="http://schemas.microsoft.com/office/drawing/2014/main" id="{EC7171BB-B1DE-28F4-8115-A8CFE6167852}"/>
-              </a:ext>
-            </a:extLst>
-          </p:cNvPr>
-          <p:cNvSpPr txBox="1"/>
-          <p:nvPr/>
-        </p:nvSpPr>
-        <p:spPr>
-          <a:xfrm>
-            <a:off x="11074400" y="6438900"/>
-            <a:ext cx="584200" cy="138499"/>
-          </a:xfrm>
-          <a:prstGeom prst="rect">
-            <a:avLst/>
-          </a:prstGeom>
-          <a:noFill/>
-        </p:spPr>
-        <p:txBody>
-          <a:bodyPr vert="horz" lIns="0" tIns="0" rIns="0" bIns="0" rtlCol="0" anchor="t">
-            <a:spAutoFit/>
-          </a:bodyPr>
-          <a:lstStyle/>
-          <a:p>
-            <a:pPr algn="r"/>
-            <a:r>
-              <a:rPr lang="en-GB" sz="900" b="1">
-                <a:solidFill>
-                  <a:srgbClr val="5C7084"/>
-                </a:solidFill>
-                <a:latin typeface="Aptos" panose="020B0004020202020204" pitchFamily="34" charset="0"/>
-              </a:rPr>
-              <a:t>17</a:t>
-            </a:r>
-          </a:p>
-        </p:txBody>
-      </p:sp>
-    </p:spTree>
-    <p:extLst>
-      <p:ext uri="{BB962C8B-B14F-4D97-AF65-F5344CB8AC3E}">
-        <p14:creationId xmlns:p14="http://schemas.microsoft.com/office/powerpoint/2010/main" val="1950695512"/>
       </p:ext>
     </p:extLst>
   </p:cSld>
@@ -14142,7 +10779,7 @@
           <a:p>
             <a:pPr algn="ctr"/>
             <a:r>
-              <a:rPr lang="en-GB" sz="1600">
+              <a:rPr lang="en-GB" sz="1600" dirty="0">
                 <a:solidFill>
                   <a:srgbClr val="16324F"/>
                 </a:solidFill>
@@ -14726,7 +11363,7 @@
           <a:p>
             <a:pPr algn="ctr"/>
             <a:r>
-              <a:rPr lang="en-GB" sz="1400" b="1">
+              <a:rPr lang="en-GB" sz="1400" b="1" dirty="0">
                 <a:solidFill>
                   <a:srgbClr val="FFFFFF"/>
                 </a:solidFill>
@@ -14735,7 +11372,7 @@
               <a:t>NEW FUSED</a:t>
             </a:r>
             <a:br>
-              <a:rPr lang="en-GB" sz="1400" b="1">
+              <a:rPr lang="en-GB" sz="1400" b="1" dirty="0">
                 <a:solidFill>
                   <a:srgbClr val="FFFFFF"/>
                 </a:solidFill>
@@ -14743,7 +11380,7 @@
               </a:rPr>
             </a:br>
             <a:r>
-              <a:rPr lang="en-GB" sz="1400" b="1">
+              <a:rPr lang="en-GB" sz="1400" b="1" dirty="0">
                 <a:solidFill>
                   <a:srgbClr val="FFFFFF"/>
                 </a:solidFill>
@@ -14909,26 +11546,26 @@
           <a:p>
             <a:pPr algn="ctr"/>
             <a:r>
-              <a:rPr lang="en-GB" sz="1400" b="1">
-                <a:solidFill>
-                  <a:srgbClr val="FFFFFF"/>
+              <a:rPr lang="en-GB" sz="1400" b="1" dirty="0">
+                <a:solidFill>
+                  <a:srgbClr val="FF0000"/>
                 </a:solidFill>
                 <a:latin typeface="Aptos" panose="020B0004020202020204" pitchFamily="34" charset="0"/>
               </a:rPr>
               <a:t>7-POSE</a:t>
             </a:r>
             <a:br>
-              <a:rPr lang="en-GB" sz="1400" b="1">
-                <a:solidFill>
-                  <a:srgbClr val="FFFFFF"/>
+              <a:rPr lang="en-GB" sz="1400" b="1" dirty="0">
+                <a:solidFill>
+                  <a:srgbClr val="FF0000"/>
                 </a:solidFill>
                 <a:latin typeface="Aptos" panose="020B0004020202020204" pitchFamily="34" charset="0"/>
               </a:rPr>
             </a:br>
             <a:r>
-              <a:rPr lang="en-GB" sz="1400" b="1">
-                <a:solidFill>
-                  <a:srgbClr val="FFFFFF"/>
+              <a:rPr lang="en-GB" sz="1400" b="1" dirty="0">
+                <a:solidFill>
+                  <a:srgbClr val="FF0000"/>
                 </a:solidFill>
                 <a:latin typeface="Aptos" panose="020B0004020202020204" pitchFamily="34" charset="0"/>
               </a:rPr>
@@ -15092,7 +11729,7 @@
           <a:p>
             <a:pPr algn="ctr"/>
             <a:r>
-              <a:rPr lang="en-GB" sz="1400" b="1">
+              <a:rPr lang="en-GB" sz="1400" b="1" dirty="0">
                 <a:solidFill>
                   <a:srgbClr val="FFFFFF"/>
                 </a:solidFill>
@@ -15101,7 +11738,7 @@
               <a:t>DEAD</a:t>
             </a:r>
             <a:br>
-              <a:rPr lang="en-GB" sz="1400" b="1">
+              <a:rPr lang="en-GB" sz="1400" b="1" dirty="0">
                 <a:solidFill>
                   <a:srgbClr val="FFFFFF"/>
                 </a:solidFill>
@@ -15109,7 +11746,7 @@
               </a:rPr>
             </a:br>
             <a:r>
-              <a:rPr lang="en-GB" sz="1400" b="1">
+              <a:rPr lang="en-GB" sz="1400" b="1" dirty="0">
                 <a:solidFill>
                   <a:srgbClr val="FFFFFF"/>
                 </a:solidFill>
@@ -15544,7 +12181,7 @@
         </p:nvSpPr>
         <p:spPr>
           <a:xfrm>
-            <a:off x="2710641" y="4002089"/>
+            <a:off x="2592164" y="3972177"/>
             <a:ext cx="2540000" cy="430887"/>
           </a:xfrm>
           <a:prstGeom prst="rect">
@@ -15560,23 +12197,15 @@
           <a:p>
             <a:pPr algn="ctr"/>
             <a:r>
-              <a:rPr lang="en-GB" sz="1400" dirty="0">
-                <a:solidFill>
-                  <a:srgbClr val="5C7084"/>
-                </a:solidFill>
-                <a:latin typeface="Aptos" panose="020B0004020202020204" pitchFamily="34" charset="0"/>
-              </a:rPr>
-              <a:t>       </a:t>
-            </a:r>
-            <a:r>
-              <a:rPr lang="en-GB" sz="1400" dirty="0">
-                <a:solidFill>
-                  <a:srgbClr val="C00000"/>
-                </a:solidFill>
-                <a:latin typeface="Aptos" panose="020B0004020202020204" pitchFamily="34" charset="0"/>
-              </a:rPr>
-              <a:t>Rejects a lone temporal outlier</a:t>
-            </a:r>
+              <a:rPr lang="en-GB" sz="1400" dirty="0"/>
+              <a:t>           Mannequin may be moving, so select one real.</a:t>
+            </a:r>
+            <a:endParaRPr lang="en-GB" sz="1400" dirty="0">
+              <a:solidFill>
+                <a:srgbClr val="C00000"/>
+              </a:solidFill>
+              <a:latin typeface="Aptos" panose="020B0004020202020204" pitchFamily="34" charset="0"/>
+            </a:endParaRPr>
           </a:p>
         </p:txBody>
       </p:sp>
